--- a/docs/pptx/whole/ritu-linsubhr-disc-anemia3.pptx
+++ b/docs/pptx/whole/ritu-linsubhr-disc-anemia3.pptx
@@ -2917,539 +2917,539 @@
           <p:spPr>
             <a:xfrm>
               <a:off x="1172049" y="2073503"/>
-              <a:ext cx="7090630" cy="3244075"/>
+              <a:ext cx="7090630" cy="3242879"/>
             </a:xfrm>
             <a:custGeom>
               <a:avLst/>
               <a:pathLst>
-                <a:path w="7090630" h="3244075">
+                <a:path w="7090630" h="3242879">
                   <a:moveTo>
-                    <a:pt x="1746647" y="0"/>
+                    <a:pt x="1735032" y="0"/>
                   </a:moveTo>
                   <a:lnTo>
-                    <a:pt x="1790563" y="76305"/>
-                  </a:lnTo>
-                  <a:lnTo>
-                    <a:pt x="1862185" y="196366"/>
-                  </a:lnTo>
-                  <a:lnTo>
-                    <a:pt x="1933808" y="312198"/>
-                  </a:lnTo>
-                  <a:lnTo>
-                    <a:pt x="2005430" y="423948"/>
-                  </a:lnTo>
-                  <a:lnTo>
-                    <a:pt x="2077053" y="531760"/>
-                  </a:lnTo>
-                  <a:lnTo>
-                    <a:pt x="2148675" y="635774"/>
-                  </a:lnTo>
-                  <a:lnTo>
-                    <a:pt x="2220298" y="736123"/>
-                  </a:lnTo>
-                  <a:lnTo>
-                    <a:pt x="2291920" y="832936"/>
-                  </a:lnTo>
-                  <a:lnTo>
-                    <a:pt x="2363543" y="926338"/>
-                  </a:lnTo>
-                  <a:lnTo>
-                    <a:pt x="2435165" y="1016448"/>
-                  </a:lnTo>
-                  <a:lnTo>
-                    <a:pt x="2506788" y="1103384"/>
-                  </a:lnTo>
-                  <a:lnTo>
-                    <a:pt x="2578410" y="1187257"/>
-                  </a:lnTo>
-                  <a:lnTo>
-                    <a:pt x="2650033" y="1268174"/>
-                  </a:lnTo>
-                  <a:lnTo>
-                    <a:pt x="2721655" y="1346240"/>
-                  </a:lnTo>
-                  <a:lnTo>
-                    <a:pt x="2793278" y="1421555"/>
-                  </a:lnTo>
-                  <a:lnTo>
-                    <a:pt x="2864901" y="1494217"/>
-                  </a:lnTo>
-                  <a:lnTo>
-                    <a:pt x="2936523" y="1564318"/>
-                  </a:lnTo>
-                  <a:lnTo>
-                    <a:pt x="3008146" y="1631950"/>
-                  </a:lnTo>
-                  <a:lnTo>
-                    <a:pt x="3079768" y="1697198"/>
-                  </a:lnTo>
-                  <a:lnTo>
-                    <a:pt x="3151391" y="1760147"/>
-                  </a:lnTo>
-                  <a:lnTo>
-                    <a:pt x="3223013" y="1820879"/>
-                  </a:lnTo>
-                  <a:lnTo>
-                    <a:pt x="3294636" y="1879470"/>
-                  </a:lnTo>
-                  <a:lnTo>
-                    <a:pt x="3366258" y="1935997"/>
-                  </a:lnTo>
-                  <a:lnTo>
-                    <a:pt x="3437881" y="1990532"/>
-                  </a:lnTo>
-                  <a:lnTo>
-                    <a:pt x="3509503" y="2043146"/>
-                  </a:lnTo>
-                  <a:lnTo>
-                    <a:pt x="3581126" y="2093906"/>
-                  </a:lnTo>
-                  <a:lnTo>
-                    <a:pt x="3652748" y="2142877"/>
-                  </a:lnTo>
-                  <a:lnTo>
-                    <a:pt x="3724371" y="2190123"/>
-                  </a:lnTo>
-                  <a:lnTo>
-                    <a:pt x="3795993" y="2235704"/>
-                  </a:lnTo>
-                  <a:lnTo>
-                    <a:pt x="3867616" y="2279679"/>
-                  </a:lnTo>
-                  <a:lnTo>
-                    <a:pt x="3939238" y="2322104"/>
-                  </a:lnTo>
-                  <a:lnTo>
-                    <a:pt x="4010861" y="2363035"/>
-                  </a:lnTo>
-                  <a:lnTo>
-                    <a:pt x="4082483" y="2402524"/>
-                  </a:lnTo>
-                  <a:lnTo>
-                    <a:pt x="4154106" y="2440621"/>
-                  </a:lnTo>
-                  <a:lnTo>
-                    <a:pt x="4225729" y="2477375"/>
-                  </a:lnTo>
-                  <a:lnTo>
-                    <a:pt x="4297351" y="2512835"/>
-                  </a:lnTo>
-                  <a:lnTo>
-                    <a:pt x="4368974" y="2547045"/>
-                  </a:lnTo>
-                  <a:lnTo>
-                    <a:pt x="4440596" y="2580050"/>
-                  </a:lnTo>
-                  <a:lnTo>
-                    <a:pt x="4512219" y="2611892"/>
-                  </a:lnTo>
-                  <a:lnTo>
-                    <a:pt x="4583841" y="2642612"/>
-                  </a:lnTo>
-                  <a:lnTo>
-                    <a:pt x="4655464" y="2654224"/>
-                  </a:lnTo>
-                  <a:lnTo>
-                    <a:pt x="4727086" y="2654126"/>
-                  </a:lnTo>
-                  <a:lnTo>
-                    <a:pt x="4798709" y="2654029"/>
-                  </a:lnTo>
-                  <a:lnTo>
-                    <a:pt x="4870331" y="2653932"/>
-                  </a:lnTo>
-                  <a:lnTo>
-                    <a:pt x="4941954" y="2653835"/>
-                  </a:lnTo>
-                  <a:lnTo>
-                    <a:pt x="5013576" y="2653738"/>
-                  </a:lnTo>
-                  <a:lnTo>
-                    <a:pt x="5085199" y="2653641"/>
-                  </a:lnTo>
-                  <a:lnTo>
-                    <a:pt x="5156821" y="2653544"/>
-                  </a:lnTo>
-                  <a:lnTo>
-                    <a:pt x="5228444" y="2653446"/>
-                  </a:lnTo>
-                  <a:lnTo>
-                    <a:pt x="5300066" y="2653349"/>
-                  </a:lnTo>
-                  <a:lnTo>
-                    <a:pt x="5371689" y="2653252"/>
-                  </a:lnTo>
-                  <a:lnTo>
-                    <a:pt x="5443311" y="2653155"/>
-                  </a:lnTo>
-                  <a:lnTo>
-                    <a:pt x="5514934" y="2653057"/>
-                  </a:lnTo>
-                  <a:lnTo>
-                    <a:pt x="5586557" y="2652960"/>
-                  </a:lnTo>
-                  <a:lnTo>
-                    <a:pt x="5658179" y="2652863"/>
-                  </a:lnTo>
-                  <a:lnTo>
-                    <a:pt x="5729802" y="2652766"/>
-                  </a:lnTo>
-                  <a:lnTo>
-                    <a:pt x="5801424" y="2652668"/>
-                  </a:lnTo>
-                  <a:lnTo>
-                    <a:pt x="5873047" y="2652571"/>
-                  </a:lnTo>
-                  <a:lnTo>
-                    <a:pt x="5944669" y="2652474"/>
-                  </a:lnTo>
-                  <a:lnTo>
-                    <a:pt x="6016292" y="2652376"/>
-                  </a:lnTo>
-                  <a:lnTo>
-                    <a:pt x="6087914" y="2652279"/>
-                  </a:lnTo>
-                  <a:lnTo>
-                    <a:pt x="6159537" y="2652182"/>
-                  </a:lnTo>
-                  <a:lnTo>
-                    <a:pt x="6231159" y="2652084"/>
-                  </a:lnTo>
-                  <a:lnTo>
-                    <a:pt x="6302782" y="2651987"/>
-                  </a:lnTo>
-                  <a:lnTo>
-                    <a:pt x="6374404" y="2651890"/>
-                  </a:lnTo>
-                  <a:lnTo>
-                    <a:pt x="6446027" y="2651792"/>
-                  </a:lnTo>
-                  <a:lnTo>
-                    <a:pt x="6517649" y="2651695"/>
-                  </a:lnTo>
-                  <a:lnTo>
-                    <a:pt x="6589272" y="2651597"/>
-                  </a:lnTo>
-                  <a:lnTo>
-                    <a:pt x="6660894" y="2651500"/>
-                  </a:lnTo>
-                  <a:lnTo>
-                    <a:pt x="6732517" y="2651403"/>
-                  </a:lnTo>
-                  <a:lnTo>
-                    <a:pt x="6804139" y="2651305"/>
-                  </a:lnTo>
-                  <a:lnTo>
-                    <a:pt x="6875762" y="2651208"/>
-                  </a:lnTo>
-                  <a:lnTo>
-                    <a:pt x="6947385" y="2651110"/>
-                  </a:lnTo>
-                  <a:lnTo>
-                    <a:pt x="7019007" y="2651013"/>
-                  </a:lnTo>
-                  <a:lnTo>
-                    <a:pt x="7090630" y="2650915"/>
-                  </a:lnTo>
-                  <a:lnTo>
-                    <a:pt x="7090630" y="3244075"/>
-                  </a:lnTo>
-                  <a:lnTo>
-                    <a:pt x="7019007" y="3235322"/>
-                  </a:lnTo>
-                  <a:lnTo>
-                    <a:pt x="6947385" y="3226249"/>
-                  </a:lnTo>
-                  <a:lnTo>
-                    <a:pt x="6875762" y="3216844"/>
-                  </a:lnTo>
-                  <a:lnTo>
-                    <a:pt x="6804139" y="3207096"/>
-                  </a:lnTo>
-                  <a:lnTo>
-                    <a:pt x="6732517" y="3196993"/>
-                  </a:lnTo>
-                  <a:lnTo>
-                    <a:pt x="6660894" y="3186520"/>
-                  </a:lnTo>
-                  <a:lnTo>
-                    <a:pt x="6589272" y="3175664"/>
-                  </a:lnTo>
-                  <a:lnTo>
-                    <a:pt x="6517649" y="3164413"/>
-                  </a:lnTo>
-                  <a:lnTo>
-                    <a:pt x="6446027" y="3152750"/>
-                  </a:lnTo>
-                  <a:lnTo>
-                    <a:pt x="6374404" y="3140661"/>
-                  </a:lnTo>
-                  <a:lnTo>
-                    <a:pt x="6302782" y="3128131"/>
-                  </a:lnTo>
-                  <a:lnTo>
-                    <a:pt x="6231159" y="3115143"/>
-                  </a:lnTo>
-                  <a:lnTo>
-                    <a:pt x="6159537" y="3101681"/>
-                  </a:lnTo>
-                  <a:lnTo>
-                    <a:pt x="6087914" y="3087727"/>
-                  </a:lnTo>
-                  <a:lnTo>
-                    <a:pt x="6016292" y="3073264"/>
-                  </a:lnTo>
-                  <a:lnTo>
-                    <a:pt x="5944669" y="3058272"/>
-                  </a:lnTo>
-                  <a:lnTo>
-                    <a:pt x="5873047" y="3042733"/>
-                  </a:lnTo>
-                  <a:lnTo>
-                    <a:pt x="5801424" y="3026626"/>
-                  </a:lnTo>
-                  <a:lnTo>
-                    <a:pt x="5729802" y="3009931"/>
-                  </a:lnTo>
-                  <a:lnTo>
-                    <a:pt x="5658179" y="2992627"/>
-                  </a:lnTo>
-                  <a:lnTo>
-                    <a:pt x="5586557" y="2974690"/>
-                  </a:lnTo>
-                  <a:lnTo>
-                    <a:pt x="5514934" y="2956098"/>
-                  </a:lnTo>
-                  <a:lnTo>
-                    <a:pt x="5443311" y="2936827"/>
-                  </a:lnTo>
-                  <a:lnTo>
-                    <a:pt x="5371689" y="2916853"/>
-                  </a:lnTo>
-                  <a:lnTo>
-                    <a:pt x="5300066" y="2896149"/>
-                  </a:lnTo>
-                  <a:lnTo>
-                    <a:pt x="5228444" y="2874689"/>
-                  </a:lnTo>
-                  <a:lnTo>
-                    <a:pt x="5156821" y="2852444"/>
-                  </a:lnTo>
-                  <a:lnTo>
-                    <a:pt x="5085199" y="2829388"/>
-                  </a:lnTo>
-                  <a:lnTo>
-                    <a:pt x="5013576" y="2805490"/>
-                  </a:lnTo>
-                  <a:lnTo>
-                    <a:pt x="4941954" y="2780718"/>
-                  </a:lnTo>
-                  <a:lnTo>
-                    <a:pt x="4870331" y="2755042"/>
-                  </a:lnTo>
-                  <a:lnTo>
-                    <a:pt x="4798709" y="2728428"/>
-                  </a:lnTo>
-                  <a:lnTo>
-                    <a:pt x="4727086" y="2700843"/>
-                  </a:lnTo>
-                  <a:lnTo>
-                    <a:pt x="4655464" y="2672249"/>
-                  </a:lnTo>
-                  <a:lnTo>
-                    <a:pt x="4583841" y="2654321"/>
-                  </a:lnTo>
-                  <a:lnTo>
-                    <a:pt x="4512219" y="2654418"/>
-                  </a:lnTo>
-                  <a:lnTo>
-                    <a:pt x="4440596" y="2654515"/>
-                  </a:lnTo>
-                  <a:lnTo>
-                    <a:pt x="4368974" y="2654612"/>
-                  </a:lnTo>
-                  <a:lnTo>
-                    <a:pt x="4297351" y="2654709"/>
-                  </a:lnTo>
-                  <a:lnTo>
-                    <a:pt x="4225729" y="2654806"/>
-                  </a:lnTo>
-                  <a:lnTo>
-                    <a:pt x="4154106" y="2654903"/>
-                  </a:lnTo>
-                  <a:lnTo>
-                    <a:pt x="4082483" y="2655000"/>
-                  </a:lnTo>
-                  <a:lnTo>
-                    <a:pt x="4010861" y="2655097"/>
-                  </a:lnTo>
-                  <a:lnTo>
-                    <a:pt x="3939238" y="2655194"/>
-                  </a:lnTo>
-                  <a:lnTo>
-                    <a:pt x="3867616" y="2655291"/>
-                  </a:lnTo>
-                  <a:lnTo>
-                    <a:pt x="3795993" y="2655388"/>
-                  </a:lnTo>
-                  <a:lnTo>
-                    <a:pt x="3724371" y="2655485"/>
-                  </a:lnTo>
-                  <a:lnTo>
-                    <a:pt x="3652748" y="2655582"/>
-                  </a:lnTo>
-                  <a:lnTo>
-                    <a:pt x="3581126" y="2655679"/>
-                  </a:lnTo>
-                  <a:lnTo>
-                    <a:pt x="3509503" y="2655776"/>
-                  </a:lnTo>
-                  <a:lnTo>
-                    <a:pt x="3437881" y="2655873"/>
-                  </a:lnTo>
-                  <a:lnTo>
-                    <a:pt x="3366258" y="2655970"/>
-                  </a:lnTo>
-                  <a:lnTo>
-                    <a:pt x="3294636" y="2656067"/>
-                  </a:lnTo>
-                  <a:lnTo>
-                    <a:pt x="3223013" y="2656164"/>
-                  </a:lnTo>
-                  <a:lnTo>
-                    <a:pt x="3151391" y="2656260"/>
-                  </a:lnTo>
-                  <a:lnTo>
-                    <a:pt x="3079768" y="2656357"/>
-                  </a:lnTo>
-                  <a:lnTo>
-                    <a:pt x="3008146" y="2656454"/>
-                  </a:lnTo>
-                  <a:lnTo>
-                    <a:pt x="2936523" y="2656551"/>
-                  </a:lnTo>
-                  <a:lnTo>
-                    <a:pt x="2864901" y="2656648"/>
-                  </a:lnTo>
-                  <a:lnTo>
-                    <a:pt x="2793278" y="2656745"/>
-                  </a:lnTo>
-                  <a:lnTo>
-                    <a:pt x="2721655" y="2656841"/>
-                  </a:lnTo>
-                  <a:lnTo>
-                    <a:pt x="2650033" y="2656938"/>
-                  </a:lnTo>
-                  <a:lnTo>
-                    <a:pt x="2578410" y="2657035"/>
-                  </a:lnTo>
-                  <a:lnTo>
-                    <a:pt x="2506788" y="2657132"/>
-                  </a:lnTo>
-                  <a:lnTo>
-                    <a:pt x="2435165" y="2657229"/>
-                  </a:lnTo>
-                  <a:lnTo>
-                    <a:pt x="2363543" y="2657325"/>
-                  </a:lnTo>
-                  <a:lnTo>
-                    <a:pt x="2291920" y="2657422"/>
-                  </a:lnTo>
-                  <a:lnTo>
-                    <a:pt x="2220298" y="2657519"/>
-                  </a:lnTo>
-                  <a:lnTo>
-                    <a:pt x="2148675" y="2657616"/>
-                  </a:lnTo>
-                  <a:lnTo>
-                    <a:pt x="2077053" y="2657712"/>
-                  </a:lnTo>
-                  <a:lnTo>
-                    <a:pt x="2005430" y="2657809"/>
-                  </a:lnTo>
-                  <a:lnTo>
-                    <a:pt x="1933808" y="2657906"/>
-                  </a:lnTo>
-                  <a:lnTo>
-                    <a:pt x="1862185" y="2658002"/>
-                  </a:lnTo>
-                  <a:lnTo>
-                    <a:pt x="1790563" y="2658099"/>
-                  </a:lnTo>
-                  <a:lnTo>
-                    <a:pt x="1718940" y="2658196"/>
-                  </a:lnTo>
-                  <a:lnTo>
-                    <a:pt x="1647318" y="2658292"/>
-                  </a:lnTo>
-                  <a:lnTo>
-                    <a:pt x="1575695" y="2658389"/>
-                  </a:lnTo>
-                  <a:lnTo>
-                    <a:pt x="1504073" y="2658486"/>
-                  </a:lnTo>
-                  <a:lnTo>
-                    <a:pt x="1432450" y="2658582"/>
-                  </a:lnTo>
-                  <a:lnTo>
-                    <a:pt x="1360827" y="2658679"/>
-                  </a:lnTo>
-                  <a:lnTo>
-                    <a:pt x="1289205" y="2658775"/>
-                  </a:lnTo>
-                  <a:lnTo>
-                    <a:pt x="1217582" y="2658872"/>
-                  </a:lnTo>
-                  <a:lnTo>
-                    <a:pt x="1145960" y="2658968"/>
-                  </a:lnTo>
-                  <a:lnTo>
-                    <a:pt x="1074337" y="2659065"/>
-                  </a:lnTo>
-                  <a:lnTo>
-                    <a:pt x="1002715" y="2659162"/>
-                  </a:lnTo>
-                  <a:lnTo>
-                    <a:pt x="931092" y="2659258"/>
-                  </a:lnTo>
-                  <a:lnTo>
-                    <a:pt x="859470" y="2659355"/>
-                  </a:lnTo>
-                  <a:lnTo>
-                    <a:pt x="787847" y="2659451"/>
-                  </a:lnTo>
-                  <a:lnTo>
-                    <a:pt x="716225" y="2659548"/>
-                  </a:lnTo>
-                  <a:lnTo>
-                    <a:pt x="644602" y="2659644"/>
-                  </a:lnTo>
-                  <a:lnTo>
-                    <a:pt x="572980" y="2659741"/>
-                  </a:lnTo>
-                  <a:lnTo>
-                    <a:pt x="501357" y="2659837"/>
-                  </a:lnTo>
-                  <a:lnTo>
-                    <a:pt x="429735" y="2659933"/>
-                  </a:lnTo>
-                  <a:lnTo>
-                    <a:pt x="358112" y="2660030"/>
-                  </a:lnTo>
-                  <a:lnTo>
-                    <a:pt x="286490" y="2660126"/>
-                  </a:lnTo>
-                  <a:lnTo>
-                    <a:pt x="214867" y="2660223"/>
-                  </a:lnTo>
-                  <a:lnTo>
-                    <a:pt x="143245" y="2660319"/>
-                  </a:lnTo>
-                  <a:lnTo>
-                    <a:pt x="71622" y="2660416"/>
-                  </a:lnTo>
-                  <a:lnTo>
-                    <a:pt x="0" y="2660512"/>
+                    <a:pt x="1790563" y="95549"/>
+                  </a:lnTo>
+                  <a:lnTo>
+                    <a:pt x="1862185" y="214463"/>
+                  </a:lnTo>
+                  <a:lnTo>
+                    <a:pt x="1933808" y="329203"/>
+                  </a:lnTo>
+                  <a:lnTo>
+                    <a:pt x="2005430" y="439916"/>
+                  </a:lnTo>
+                  <a:lnTo>
+                    <a:pt x="2077053" y="546744"/>
+                  </a:lnTo>
+                  <a:lnTo>
+                    <a:pt x="2148675" y="649822"/>
+                  </a:lnTo>
+                  <a:lnTo>
+                    <a:pt x="2220298" y="749283"/>
+                  </a:lnTo>
+                  <a:lnTo>
+                    <a:pt x="2291920" y="845253"/>
+                  </a:lnTo>
+                  <a:lnTo>
+                    <a:pt x="2363543" y="937855"/>
+                  </a:lnTo>
+                  <a:lnTo>
+                    <a:pt x="2435165" y="1027206"/>
+                  </a:lnTo>
+                  <a:lnTo>
+                    <a:pt x="2506788" y="1113422"/>
+                  </a:lnTo>
+                  <a:lnTo>
+                    <a:pt x="2578410" y="1196612"/>
+                  </a:lnTo>
+                  <a:lnTo>
+                    <a:pt x="2650033" y="1276882"/>
+                  </a:lnTo>
+                  <a:lnTo>
+                    <a:pt x="2721655" y="1354336"/>
+                  </a:lnTo>
+                  <a:lnTo>
+                    <a:pt x="2793278" y="1429070"/>
+                  </a:lnTo>
+                  <a:lnTo>
+                    <a:pt x="2864901" y="1501182"/>
+                  </a:lnTo>
+                  <a:lnTo>
+                    <a:pt x="2936523" y="1570763"/>
+                  </a:lnTo>
+                  <a:lnTo>
+                    <a:pt x="3008146" y="1637902"/>
+                  </a:lnTo>
+                  <a:lnTo>
+                    <a:pt x="3079768" y="1702684"/>
+                  </a:lnTo>
+                  <a:lnTo>
+                    <a:pt x="3151391" y="1765193"/>
+                  </a:lnTo>
+                  <a:lnTo>
+                    <a:pt x="3223013" y="1825509"/>
+                  </a:lnTo>
+                  <a:lnTo>
+                    <a:pt x="3294636" y="1883707"/>
+                  </a:lnTo>
+                  <a:lnTo>
+                    <a:pt x="3366258" y="1939862"/>
+                  </a:lnTo>
+                  <a:lnTo>
+                    <a:pt x="3437881" y="1994047"/>
+                  </a:lnTo>
+                  <a:lnTo>
+                    <a:pt x="3509503" y="2046330"/>
+                  </a:lnTo>
+                  <a:lnTo>
+                    <a:pt x="3581126" y="2096779"/>
+                  </a:lnTo>
+                  <a:lnTo>
+                    <a:pt x="3652748" y="2145456"/>
+                  </a:lnTo>
+                  <a:lnTo>
+                    <a:pt x="3724371" y="2192425"/>
+                  </a:lnTo>
+                  <a:lnTo>
+                    <a:pt x="3795993" y="2237746"/>
+                  </a:lnTo>
+                  <a:lnTo>
+                    <a:pt x="3867616" y="2281476"/>
+                  </a:lnTo>
+                  <a:lnTo>
+                    <a:pt x="3939238" y="2323672"/>
+                  </a:lnTo>
+                  <a:lnTo>
+                    <a:pt x="4010861" y="2364386"/>
+                  </a:lnTo>
+                  <a:lnTo>
+                    <a:pt x="4082483" y="2403672"/>
+                  </a:lnTo>
+                  <a:lnTo>
+                    <a:pt x="4154106" y="2441579"/>
+                  </a:lnTo>
+                  <a:lnTo>
+                    <a:pt x="4225729" y="2478155"/>
+                  </a:lnTo>
+                  <a:lnTo>
+                    <a:pt x="4297351" y="2513448"/>
+                  </a:lnTo>
+                  <a:lnTo>
+                    <a:pt x="4368974" y="2547502"/>
+                  </a:lnTo>
+                  <a:lnTo>
+                    <a:pt x="4440596" y="2580361"/>
+                  </a:lnTo>
+                  <a:lnTo>
+                    <a:pt x="4512219" y="2612066"/>
+                  </a:lnTo>
+                  <a:lnTo>
+                    <a:pt x="4583841" y="2642659"/>
+                  </a:lnTo>
+                  <a:lnTo>
+                    <a:pt x="4655464" y="2654202"/>
+                  </a:lnTo>
+                  <a:lnTo>
+                    <a:pt x="4727086" y="2654071"/>
+                  </a:lnTo>
+                  <a:lnTo>
+                    <a:pt x="4798709" y="2653939"/>
+                  </a:lnTo>
+                  <a:lnTo>
+                    <a:pt x="4870331" y="2653807"/>
+                  </a:lnTo>
+                  <a:lnTo>
+                    <a:pt x="4941954" y="2653675"/>
+                  </a:lnTo>
+                  <a:lnTo>
+                    <a:pt x="5013576" y="2653544"/>
+                  </a:lnTo>
+                  <a:lnTo>
+                    <a:pt x="5085199" y="2653412"/>
+                  </a:lnTo>
+                  <a:lnTo>
+                    <a:pt x="5156821" y="2653280"/>
+                  </a:lnTo>
+                  <a:lnTo>
+                    <a:pt x="5228444" y="2653148"/>
+                  </a:lnTo>
+                  <a:lnTo>
+                    <a:pt x="5300066" y="2653016"/>
+                  </a:lnTo>
+                  <a:lnTo>
+                    <a:pt x="5371689" y="2652884"/>
+                  </a:lnTo>
+                  <a:lnTo>
+                    <a:pt x="5443311" y="2652752"/>
+                  </a:lnTo>
+                  <a:lnTo>
+                    <a:pt x="5514934" y="2652620"/>
+                  </a:lnTo>
+                  <a:lnTo>
+                    <a:pt x="5586557" y="2652488"/>
+                  </a:lnTo>
+                  <a:lnTo>
+                    <a:pt x="5658179" y="2652356"/>
+                  </a:lnTo>
+                  <a:lnTo>
+                    <a:pt x="5729802" y="2652224"/>
+                  </a:lnTo>
+                  <a:lnTo>
+                    <a:pt x="5801424" y="2652092"/>
+                  </a:lnTo>
+                  <a:lnTo>
+                    <a:pt x="5873047" y="2651960"/>
+                  </a:lnTo>
+                  <a:lnTo>
+                    <a:pt x="5944669" y="2651828"/>
+                  </a:lnTo>
+                  <a:lnTo>
+                    <a:pt x="6016292" y="2651696"/>
+                  </a:lnTo>
+                  <a:lnTo>
+                    <a:pt x="6087914" y="2651564"/>
+                  </a:lnTo>
+                  <a:lnTo>
+                    <a:pt x="6159537" y="2651432"/>
+                  </a:lnTo>
+                  <a:lnTo>
+                    <a:pt x="6231159" y="2651300"/>
+                  </a:lnTo>
+                  <a:lnTo>
+                    <a:pt x="6302782" y="2651167"/>
+                  </a:lnTo>
+                  <a:lnTo>
+                    <a:pt x="6374404" y="2651035"/>
+                  </a:lnTo>
+                  <a:lnTo>
+                    <a:pt x="6446027" y="2650903"/>
+                  </a:lnTo>
+                  <a:lnTo>
+                    <a:pt x="6517649" y="2650771"/>
+                  </a:lnTo>
+                  <a:lnTo>
+                    <a:pt x="6589272" y="2650638"/>
+                  </a:lnTo>
+                  <a:lnTo>
+                    <a:pt x="6660894" y="2650506"/>
+                  </a:lnTo>
+                  <a:lnTo>
+                    <a:pt x="6732517" y="2650374"/>
+                  </a:lnTo>
+                  <a:lnTo>
+                    <a:pt x="6804139" y="2650241"/>
+                  </a:lnTo>
+                  <a:lnTo>
+                    <a:pt x="6875762" y="2650109"/>
+                  </a:lnTo>
+                  <a:lnTo>
+                    <a:pt x="6947385" y="2649977"/>
+                  </a:lnTo>
+                  <a:lnTo>
+                    <a:pt x="7019007" y="2649844"/>
+                  </a:lnTo>
+                  <a:lnTo>
+                    <a:pt x="7090630" y="2649712"/>
+                  </a:lnTo>
+                  <a:lnTo>
+                    <a:pt x="7090630" y="3242879"/>
+                  </a:lnTo>
+                  <a:lnTo>
+                    <a:pt x="7019007" y="3234118"/>
+                  </a:lnTo>
+                  <a:lnTo>
+                    <a:pt x="6947385" y="3225038"/>
+                  </a:lnTo>
+                  <a:lnTo>
+                    <a:pt x="6875762" y="3215628"/>
+                  </a:lnTo>
+                  <a:lnTo>
+                    <a:pt x="6804139" y="3205876"/>
+                  </a:lnTo>
+                  <a:lnTo>
+                    <a:pt x="6732517" y="3195769"/>
+                  </a:lnTo>
+                  <a:lnTo>
+                    <a:pt x="6660894" y="3185294"/>
+                  </a:lnTo>
+                  <a:lnTo>
+                    <a:pt x="6589272" y="3174439"/>
+                  </a:lnTo>
+                  <a:lnTo>
+                    <a:pt x="6517649" y="3163188"/>
+                  </a:lnTo>
+                  <a:lnTo>
+                    <a:pt x="6446027" y="3151529"/>
+                  </a:lnTo>
+                  <a:lnTo>
+                    <a:pt x="6374404" y="3139445"/>
+                  </a:lnTo>
+                  <a:lnTo>
+                    <a:pt x="6302782" y="3126922"/>
+                  </a:lnTo>
+                  <a:lnTo>
+                    <a:pt x="6231159" y="3113943"/>
+                  </a:lnTo>
+                  <a:lnTo>
+                    <a:pt x="6159537" y="3100492"/>
+                  </a:lnTo>
+                  <a:lnTo>
+                    <a:pt x="6087914" y="3086552"/>
+                  </a:lnTo>
+                  <a:lnTo>
+                    <a:pt x="6016292" y="3072105"/>
+                  </a:lnTo>
+                  <a:lnTo>
+                    <a:pt x="5944669" y="3057132"/>
+                  </a:lnTo>
+                  <a:lnTo>
+                    <a:pt x="5873047" y="3041615"/>
+                  </a:lnTo>
+                  <a:lnTo>
+                    <a:pt x="5801424" y="3025533"/>
+                  </a:lnTo>
+                  <a:lnTo>
+                    <a:pt x="5729802" y="3008867"/>
+                  </a:lnTo>
+                  <a:lnTo>
+                    <a:pt x="5658179" y="2991594"/>
+                  </a:lnTo>
+                  <a:lnTo>
+                    <a:pt x="5586557" y="2973693"/>
+                  </a:lnTo>
+                  <a:lnTo>
+                    <a:pt x="5514934" y="2955141"/>
+                  </a:lnTo>
+                  <a:lnTo>
+                    <a:pt x="5443311" y="2935914"/>
+                  </a:lnTo>
+                  <a:lnTo>
+                    <a:pt x="5371689" y="2915987"/>
+                  </a:lnTo>
+                  <a:lnTo>
+                    <a:pt x="5300066" y="2895336"/>
+                  </a:lnTo>
+                  <a:lnTo>
+                    <a:pt x="5228444" y="2873934"/>
+                  </a:lnTo>
+                  <a:lnTo>
+                    <a:pt x="5156821" y="2851753"/>
+                  </a:lnTo>
+                  <a:lnTo>
+                    <a:pt x="5085199" y="2828766"/>
+                  </a:lnTo>
+                  <a:lnTo>
+                    <a:pt x="5013576" y="2804942"/>
+                  </a:lnTo>
+                  <a:lnTo>
+                    <a:pt x="4941954" y="2780252"/>
+                  </a:lnTo>
+                  <a:lnTo>
+                    <a:pt x="4870331" y="2754664"/>
+                  </a:lnTo>
+                  <a:lnTo>
+                    <a:pt x="4798709" y="2728145"/>
+                  </a:lnTo>
+                  <a:lnTo>
+                    <a:pt x="4727086" y="2700661"/>
+                  </a:lnTo>
+                  <a:lnTo>
+                    <a:pt x="4655464" y="2672178"/>
+                  </a:lnTo>
+                  <a:lnTo>
+                    <a:pt x="4583841" y="2654334"/>
+                  </a:lnTo>
+                  <a:lnTo>
+                    <a:pt x="4512219" y="2654466"/>
+                  </a:lnTo>
+                  <a:lnTo>
+                    <a:pt x="4440596" y="2654598"/>
+                  </a:lnTo>
+                  <a:lnTo>
+                    <a:pt x="4368974" y="2654729"/>
+                  </a:lnTo>
+                  <a:lnTo>
+                    <a:pt x="4297351" y="2654861"/>
+                  </a:lnTo>
+                  <a:lnTo>
+                    <a:pt x="4225729" y="2654992"/>
+                  </a:lnTo>
+                  <a:lnTo>
+                    <a:pt x="4154106" y="2655124"/>
+                  </a:lnTo>
+                  <a:lnTo>
+                    <a:pt x="4082483" y="2655256"/>
+                  </a:lnTo>
+                  <a:lnTo>
+                    <a:pt x="4010861" y="2655387"/>
+                  </a:lnTo>
+                  <a:lnTo>
+                    <a:pt x="3939238" y="2655519"/>
+                  </a:lnTo>
+                  <a:lnTo>
+                    <a:pt x="3867616" y="2655650"/>
+                  </a:lnTo>
+                  <a:lnTo>
+                    <a:pt x="3795993" y="2655782"/>
+                  </a:lnTo>
+                  <a:lnTo>
+                    <a:pt x="3724371" y="2655913"/>
+                  </a:lnTo>
+                  <a:lnTo>
+                    <a:pt x="3652748" y="2656044"/>
+                  </a:lnTo>
+                  <a:lnTo>
+                    <a:pt x="3581126" y="2656176"/>
+                  </a:lnTo>
+                  <a:lnTo>
+                    <a:pt x="3509503" y="2656307"/>
+                  </a:lnTo>
+                  <a:lnTo>
+                    <a:pt x="3437881" y="2656439"/>
+                  </a:lnTo>
+                  <a:lnTo>
+                    <a:pt x="3366258" y="2656570"/>
+                  </a:lnTo>
+                  <a:lnTo>
+                    <a:pt x="3294636" y="2656701"/>
+                  </a:lnTo>
+                  <a:lnTo>
+                    <a:pt x="3223013" y="2656833"/>
+                  </a:lnTo>
+                  <a:lnTo>
+                    <a:pt x="3151391" y="2656964"/>
+                  </a:lnTo>
+                  <a:lnTo>
+                    <a:pt x="3079768" y="2657095"/>
+                  </a:lnTo>
+                  <a:lnTo>
+                    <a:pt x="3008146" y="2657226"/>
+                  </a:lnTo>
+                  <a:lnTo>
+                    <a:pt x="2936523" y="2657358"/>
+                  </a:lnTo>
+                  <a:lnTo>
+                    <a:pt x="2864901" y="2657489"/>
+                  </a:lnTo>
+                  <a:lnTo>
+                    <a:pt x="2793278" y="2657620"/>
+                  </a:lnTo>
+                  <a:lnTo>
+                    <a:pt x="2721655" y="2657751"/>
+                  </a:lnTo>
+                  <a:lnTo>
+                    <a:pt x="2650033" y="2657882"/>
+                  </a:lnTo>
+                  <a:lnTo>
+                    <a:pt x="2578410" y="2658014"/>
+                  </a:lnTo>
+                  <a:lnTo>
+                    <a:pt x="2506788" y="2658145"/>
+                  </a:lnTo>
+                  <a:lnTo>
+                    <a:pt x="2435165" y="2658276"/>
+                  </a:lnTo>
+                  <a:lnTo>
+                    <a:pt x="2363543" y="2658407"/>
+                  </a:lnTo>
+                  <a:lnTo>
+                    <a:pt x="2291920" y="2658538"/>
+                  </a:lnTo>
+                  <a:lnTo>
+                    <a:pt x="2220298" y="2658669"/>
+                  </a:lnTo>
+                  <a:lnTo>
+                    <a:pt x="2148675" y="2658800"/>
+                  </a:lnTo>
+                  <a:lnTo>
+                    <a:pt x="2077053" y="2658931"/>
+                  </a:lnTo>
+                  <a:lnTo>
+                    <a:pt x="2005430" y="2659062"/>
+                  </a:lnTo>
+                  <a:lnTo>
+                    <a:pt x="1933808" y="2659193"/>
+                  </a:lnTo>
+                  <a:lnTo>
+                    <a:pt x="1862185" y="2659324"/>
+                  </a:lnTo>
+                  <a:lnTo>
+                    <a:pt x="1790563" y="2659455"/>
+                  </a:lnTo>
+                  <a:lnTo>
+                    <a:pt x="1718940" y="2659585"/>
+                  </a:lnTo>
+                  <a:lnTo>
+                    <a:pt x="1647318" y="2659716"/>
+                  </a:lnTo>
+                  <a:lnTo>
+                    <a:pt x="1575695" y="2659847"/>
+                  </a:lnTo>
+                  <a:lnTo>
+                    <a:pt x="1504073" y="2659978"/>
+                  </a:lnTo>
+                  <a:lnTo>
+                    <a:pt x="1432450" y="2660109"/>
+                  </a:lnTo>
+                  <a:lnTo>
+                    <a:pt x="1360827" y="2660239"/>
+                  </a:lnTo>
+                  <a:lnTo>
+                    <a:pt x="1289205" y="2660370"/>
+                  </a:lnTo>
+                  <a:lnTo>
+                    <a:pt x="1217582" y="2660501"/>
+                  </a:lnTo>
+                  <a:lnTo>
+                    <a:pt x="1145960" y="2660632"/>
+                  </a:lnTo>
+                  <a:lnTo>
+                    <a:pt x="1074337" y="2660762"/>
+                  </a:lnTo>
+                  <a:lnTo>
+                    <a:pt x="1002715" y="2660893"/>
+                  </a:lnTo>
+                  <a:lnTo>
+                    <a:pt x="931092" y="2661024"/>
+                  </a:lnTo>
+                  <a:lnTo>
+                    <a:pt x="859470" y="2661154"/>
+                  </a:lnTo>
+                  <a:lnTo>
+                    <a:pt x="787847" y="2661285"/>
+                  </a:lnTo>
+                  <a:lnTo>
+                    <a:pt x="716225" y="2661415"/>
+                  </a:lnTo>
+                  <a:lnTo>
+                    <a:pt x="644602" y="2661546"/>
+                  </a:lnTo>
+                  <a:lnTo>
+                    <a:pt x="572980" y="2661677"/>
+                  </a:lnTo>
+                  <a:lnTo>
+                    <a:pt x="501357" y="2661807"/>
+                  </a:lnTo>
+                  <a:lnTo>
+                    <a:pt x="429735" y="2661938"/>
+                  </a:lnTo>
+                  <a:lnTo>
+                    <a:pt x="358112" y="2662068"/>
+                  </a:lnTo>
+                  <a:lnTo>
+                    <a:pt x="286490" y="2662199"/>
+                  </a:lnTo>
+                  <a:lnTo>
+                    <a:pt x="214867" y="2662329"/>
+                  </a:lnTo>
+                  <a:lnTo>
+                    <a:pt x="143245" y="2662459"/>
+                  </a:lnTo>
+                  <a:lnTo>
+                    <a:pt x="71622" y="2662590"/>
+                  </a:lnTo>
+                  <a:lnTo>
+                    <a:pt x="0" y="2662720"/>
                   </a:lnTo>
                   <a:close/>
                 </a:path>
@@ -3475,240 +3475,240 @@
           </p:nvSpPr>
           <p:spPr>
             <a:xfrm>
-              <a:off x="2918696" y="2073503"/>
-              <a:ext cx="5343982" cy="2654224"/>
+              <a:off x="2907081" y="2073503"/>
+              <a:ext cx="5355597" cy="2654202"/>
             </a:xfrm>
             <a:custGeom>
               <a:avLst/>
               <a:pathLst>
-                <a:path w="5343982" h="2654224">
+                <a:path w="5355597" h="2654202">
                   <a:moveTo>
                     <a:pt x="0" y="0"/>
                   </a:moveTo>
                   <a:lnTo>
-                    <a:pt x="43915" y="76305"/>
-                  </a:lnTo>
-                  <a:lnTo>
-                    <a:pt x="115538" y="196366"/>
-                  </a:lnTo>
-                  <a:lnTo>
-                    <a:pt x="187160" y="312198"/>
-                  </a:lnTo>
-                  <a:lnTo>
-                    <a:pt x="258783" y="423948"/>
-                  </a:lnTo>
-                  <a:lnTo>
-                    <a:pt x="330405" y="531760"/>
-                  </a:lnTo>
-                  <a:lnTo>
-                    <a:pt x="402028" y="635774"/>
-                  </a:lnTo>
-                  <a:lnTo>
-                    <a:pt x="473650" y="736123"/>
-                  </a:lnTo>
-                  <a:lnTo>
-                    <a:pt x="545273" y="832936"/>
-                  </a:lnTo>
-                  <a:lnTo>
-                    <a:pt x="616895" y="926338"/>
-                  </a:lnTo>
-                  <a:lnTo>
-                    <a:pt x="688518" y="1016448"/>
-                  </a:lnTo>
-                  <a:lnTo>
-                    <a:pt x="760140" y="1103384"/>
-                  </a:lnTo>
-                  <a:lnTo>
-                    <a:pt x="831763" y="1187257"/>
-                  </a:lnTo>
-                  <a:lnTo>
-                    <a:pt x="903385" y="1268174"/>
-                  </a:lnTo>
-                  <a:lnTo>
-                    <a:pt x="975008" y="1346240"/>
-                  </a:lnTo>
-                  <a:lnTo>
-                    <a:pt x="1046631" y="1421555"/>
-                  </a:lnTo>
-                  <a:lnTo>
-                    <a:pt x="1118253" y="1494217"/>
-                  </a:lnTo>
-                  <a:lnTo>
-                    <a:pt x="1189876" y="1564318"/>
-                  </a:lnTo>
-                  <a:lnTo>
-                    <a:pt x="1261498" y="1631950"/>
-                  </a:lnTo>
-                  <a:lnTo>
-                    <a:pt x="1333121" y="1697198"/>
-                  </a:lnTo>
-                  <a:lnTo>
-                    <a:pt x="1404743" y="1760147"/>
-                  </a:lnTo>
-                  <a:lnTo>
-                    <a:pt x="1476366" y="1820879"/>
-                  </a:lnTo>
-                  <a:lnTo>
-                    <a:pt x="1547988" y="1879470"/>
-                  </a:lnTo>
-                  <a:lnTo>
-                    <a:pt x="1619611" y="1935997"/>
-                  </a:lnTo>
-                  <a:lnTo>
-                    <a:pt x="1691233" y="1990532"/>
-                  </a:lnTo>
-                  <a:lnTo>
-                    <a:pt x="1762856" y="2043146"/>
-                  </a:lnTo>
-                  <a:lnTo>
-                    <a:pt x="1834478" y="2093906"/>
-                  </a:lnTo>
-                  <a:lnTo>
-                    <a:pt x="1906101" y="2142877"/>
-                  </a:lnTo>
-                  <a:lnTo>
-                    <a:pt x="1977723" y="2190123"/>
-                  </a:lnTo>
-                  <a:lnTo>
-                    <a:pt x="2049346" y="2235704"/>
-                  </a:lnTo>
-                  <a:lnTo>
-                    <a:pt x="2120968" y="2279679"/>
-                  </a:lnTo>
-                  <a:lnTo>
-                    <a:pt x="2192591" y="2322104"/>
-                  </a:lnTo>
-                  <a:lnTo>
-                    <a:pt x="2264213" y="2363035"/>
-                  </a:lnTo>
-                  <a:lnTo>
-                    <a:pt x="2335836" y="2402524"/>
-                  </a:lnTo>
-                  <a:lnTo>
-                    <a:pt x="2407459" y="2440621"/>
-                  </a:lnTo>
-                  <a:lnTo>
-                    <a:pt x="2479081" y="2477375"/>
-                  </a:lnTo>
-                  <a:lnTo>
-                    <a:pt x="2550704" y="2512835"/>
-                  </a:lnTo>
-                  <a:lnTo>
-                    <a:pt x="2622326" y="2547045"/>
-                  </a:lnTo>
-                  <a:lnTo>
-                    <a:pt x="2693949" y="2580050"/>
-                  </a:lnTo>
-                  <a:lnTo>
-                    <a:pt x="2765571" y="2611892"/>
-                  </a:lnTo>
-                  <a:lnTo>
-                    <a:pt x="2837194" y="2642612"/>
-                  </a:lnTo>
-                  <a:lnTo>
-                    <a:pt x="2908816" y="2654224"/>
-                  </a:lnTo>
-                  <a:lnTo>
-                    <a:pt x="2980439" y="2654126"/>
-                  </a:lnTo>
-                  <a:lnTo>
-                    <a:pt x="3052061" y="2654029"/>
-                  </a:lnTo>
-                  <a:lnTo>
-                    <a:pt x="3123684" y="2653932"/>
-                  </a:lnTo>
-                  <a:lnTo>
-                    <a:pt x="3195306" y="2653835"/>
-                  </a:lnTo>
-                  <a:lnTo>
-                    <a:pt x="3266929" y="2653738"/>
-                  </a:lnTo>
-                  <a:lnTo>
-                    <a:pt x="3338551" y="2653641"/>
-                  </a:lnTo>
-                  <a:lnTo>
-                    <a:pt x="3410174" y="2653544"/>
-                  </a:lnTo>
-                  <a:lnTo>
-                    <a:pt x="3481796" y="2653446"/>
-                  </a:lnTo>
-                  <a:lnTo>
-                    <a:pt x="3553419" y="2653349"/>
-                  </a:lnTo>
-                  <a:lnTo>
-                    <a:pt x="3625041" y="2653252"/>
-                  </a:lnTo>
-                  <a:lnTo>
-                    <a:pt x="3696664" y="2653155"/>
-                  </a:lnTo>
-                  <a:lnTo>
-                    <a:pt x="3768287" y="2653057"/>
-                  </a:lnTo>
-                  <a:lnTo>
-                    <a:pt x="3839909" y="2652960"/>
-                  </a:lnTo>
-                  <a:lnTo>
-                    <a:pt x="3911532" y="2652863"/>
-                  </a:lnTo>
-                  <a:lnTo>
-                    <a:pt x="3983154" y="2652766"/>
-                  </a:lnTo>
-                  <a:lnTo>
-                    <a:pt x="4054777" y="2652668"/>
-                  </a:lnTo>
-                  <a:lnTo>
-                    <a:pt x="4126399" y="2652571"/>
-                  </a:lnTo>
-                  <a:lnTo>
-                    <a:pt x="4198022" y="2652474"/>
-                  </a:lnTo>
-                  <a:lnTo>
-                    <a:pt x="4269644" y="2652376"/>
-                  </a:lnTo>
-                  <a:lnTo>
-                    <a:pt x="4341267" y="2652279"/>
-                  </a:lnTo>
-                  <a:lnTo>
-                    <a:pt x="4412889" y="2652182"/>
-                  </a:lnTo>
-                  <a:lnTo>
-                    <a:pt x="4484512" y="2652084"/>
-                  </a:lnTo>
-                  <a:lnTo>
-                    <a:pt x="4556134" y="2651987"/>
-                  </a:lnTo>
-                  <a:lnTo>
-                    <a:pt x="4627757" y="2651890"/>
-                  </a:lnTo>
-                  <a:lnTo>
-                    <a:pt x="4699379" y="2651792"/>
-                  </a:lnTo>
-                  <a:lnTo>
-                    <a:pt x="4771002" y="2651695"/>
-                  </a:lnTo>
-                  <a:lnTo>
-                    <a:pt x="4842624" y="2651597"/>
-                  </a:lnTo>
-                  <a:lnTo>
-                    <a:pt x="4914247" y="2651500"/>
-                  </a:lnTo>
-                  <a:lnTo>
-                    <a:pt x="4985869" y="2651403"/>
-                  </a:lnTo>
-                  <a:lnTo>
-                    <a:pt x="5057492" y="2651305"/>
-                  </a:lnTo>
-                  <a:lnTo>
-                    <a:pt x="5129115" y="2651208"/>
-                  </a:lnTo>
-                  <a:lnTo>
-                    <a:pt x="5200737" y="2651110"/>
-                  </a:lnTo>
-                  <a:lnTo>
-                    <a:pt x="5272360" y="2651013"/>
-                  </a:lnTo>
-                  <a:lnTo>
-                    <a:pt x="5343982" y="2650915"/>
+                    <a:pt x="55530" y="95549"/>
+                  </a:lnTo>
+                  <a:lnTo>
+                    <a:pt x="127153" y="214463"/>
+                  </a:lnTo>
+                  <a:lnTo>
+                    <a:pt x="198775" y="329203"/>
+                  </a:lnTo>
+                  <a:lnTo>
+                    <a:pt x="270398" y="439916"/>
+                  </a:lnTo>
+                  <a:lnTo>
+                    <a:pt x="342020" y="546744"/>
+                  </a:lnTo>
+                  <a:lnTo>
+                    <a:pt x="413643" y="649822"/>
+                  </a:lnTo>
+                  <a:lnTo>
+                    <a:pt x="485265" y="749283"/>
+                  </a:lnTo>
+                  <a:lnTo>
+                    <a:pt x="556888" y="845253"/>
+                  </a:lnTo>
+                  <a:lnTo>
+                    <a:pt x="628510" y="937855"/>
+                  </a:lnTo>
+                  <a:lnTo>
+                    <a:pt x="700133" y="1027206"/>
+                  </a:lnTo>
+                  <a:lnTo>
+                    <a:pt x="771755" y="1113422"/>
+                  </a:lnTo>
+                  <a:lnTo>
+                    <a:pt x="843378" y="1196612"/>
+                  </a:lnTo>
+                  <a:lnTo>
+                    <a:pt x="915000" y="1276882"/>
+                  </a:lnTo>
+                  <a:lnTo>
+                    <a:pt x="986623" y="1354336"/>
+                  </a:lnTo>
+                  <a:lnTo>
+                    <a:pt x="1058245" y="1429070"/>
+                  </a:lnTo>
+                  <a:lnTo>
+                    <a:pt x="1129868" y="1501182"/>
+                  </a:lnTo>
+                  <a:lnTo>
+                    <a:pt x="1201490" y="1570763"/>
+                  </a:lnTo>
+                  <a:lnTo>
+                    <a:pt x="1273113" y="1637902"/>
+                  </a:lnTo>
+                  <a:lnTo>
+                    <a:pt x="1344736" y="1702684"/>
+                  </a:lnTo>
+                  <a:lnTo>
+                    <a:pt x="1416358" y="1765193"/>
+                  </a:lnTo>
+                  <a:lnTo>
+                    <a:pt x="1487981" y="1825509"/>
+                  </a:lnTo>
+                  <a:lnTo>
+                    <a:pt x="1559603" y="1883707"/>
+                  </a:lnTo>
+                  <a:lnTo>
+                    <a:pt x="1631226" y="1939862"/>
+                  </a:lnTo>
+                  <a:lnTo>
+                    <a:pt x="1702848" y="1994047"/>
+                  </a:lnTo>
+                  <a:lnTo>
+                    <a:pt x="1774471" y="2046330"/>
+                  </a:lnTo>
+                  <a:lnTo>
+                    <a:pt x="1846093" y="2096779"/>
+                  </a:lnTo>
+                  <a:lnTo>
+                    <a:pt x="1917716" y="2145456"/>
+                  </a:lnTo>
+                  <a:lnTo>
+                    <a:pt x="1989338" y="2192425"/>
+                  </a:lnTo>
+                  <a:lnTo>
+                    <a:pt x="2060961" y="2237746"/>
+                  </a:lnTo>
+                  <a:lnTo>
+                    <a:pt x="2132583" y="2281476"/>
+                  </a:lnTo>
+                  <a:lnTo>
+                    <a:pt x="2204206" y="2323672"/>
+                  </a:lnTo>
+                  <a:lnTo>
+                    <a:pt x="2275828" y="2364386"/>
+                  </a:lnTo>
+                  <a:lnTo>
+                    <a:pt x="2347451" y="2403672"/>
+                  </a:lnTo>
+                  <a:lnTo>
+                    <a:pt x="2419073" y="2441579"/>
+                  </a:lnTo>
+                  <a:lnTo>
+                    <a:pt x="2490696" y="2478155"/>
+                  </a:lnTo>
+                  <a:lnTo>
+                    <a:pt x="2562318" y="2513448"/>
+                  </a:lnTo>
+                  <a:lnTo>
+                    <a:pt x="2633941" y="2547502"/>
+                  </a:lnTo>
+                  <a:lnTo>
+                    <a:pt x="2705564" y="2580361"/>
+                  </a:lnTo>
+                  <a:lnTo>
+                    <a:pt x="2777186" y="2612066"/>
+                  </a:lnTo>
+                  <a:lnTo>
+                    <a:pt x="2848809" y="2642659"/>
+                  </a:lnTo>
+                  <a:lnTo>
+                    <a:pt x="2920431" y="2654202"/>
+                  </a:lnTo>
+                  <a:lnTo>
+                    <a:pt x="2992054" y="2654071"/>
+                  </a:lnTo>
+                  <a:lnTo>
+                    <a:pt x="3063676" y="2653939"/>
+                  </a:lnTo>
+                  <a:lnTo>
+                    <a:pt x="3135299" y="2653807"/>
+                  </a:lnTo>
+                  <a:lnTo>
+                    <a:pt x="3206921" y="2653675"/>
+                  </a:lnTo>
+                  <a:lnTo>
+                    <a:pt x="3278544" y="2653544"/>
+                  </a:lnTo>
+                  <a:lnTo>
+                    <a:pt x="3350166" y="2653412"/>
+                  </a:lnTo>
+                  <a:lnTo>
+                    <a:pt x="3421789" y="2653280"/>
+                  </a:lnTo>
+                  <a:lnTo>
+                    <a:pt x="3493411" y="2653148"/>
+                  </a:lnTo>
+                  <a:lnTo>
+                    <a:pt x="3565034" y="2653016"/>
+                  </a:lnTo>
+                  <a:lnTo>
+                    <a:pt x="3636656" y="2652884"/>
+                  </a:lnTo>
+                  <a:lnTo>
+                    <a:pt x="3708279" y="2652752"/>
+                  </a:lnTo>
+                  <a:lnTo>
+                    <a:pt x="3779901" y="2652620"/>
+                  </a:lnTo>
+                  <a:lnTo>
+                    <a:pt x="3851524" y="2652488"/>
+                  </a:lnTo>
+                  <a:lnTo>
+                    <a:pt x="3923146" y="2652356"/>
+                  </a:lnTo>
+                  <a:lnTo>
+                    <a:pt x="3994769" y="2652224"/>
+                  </a:lnTo>
+                  <a:lnTo>
+                    <a:pt x="4066392" y="2652092"/>
+                  </a:lnTo>
+                  <a:lnTo>
+                    <a:pt x="4138014" y="2651960"/>
+                  </a:lnTo>
+                  <a:lnTo>
+                    <a:pt x="4209637" y="2651828"/>
+                  </a:lnTo>
+                  <a:lnTo>
+                    <a:pt x="4281259" y="2651696"/>
+                  </a:lnTo>
+                  <a:lnTo>
+                    <a:pt x="4352882" y="2651564"/>
+                  </a:lnTo>
+                  <a:lnTo>
+                    <a:pt x="4424504" y="2651432"/>
+                  </a:lnTo>
+                  <a:lnTo>
+                    <a:pt x="4496127" y="2651300"/>
+                  </a:lnTo>
+                  <a:lnTo>
+                    <a:pt x="4567749" y="2651167"/>
+                  </a:lnTo>
+                  <a:lnTo>
+                    <a:pt x="4639372" y="2651035"/>
+                  </a:lnTo>
+                  <a:lnTo>
+                    <a:pt x="4710994" y="2650903"/>
+                  </a:lnTo>
+                  <a:lnTo>
+                    <a:pt x="4782617" y="2650771"/>
+                  </a:lnTo>
+                  <a:lnTo>
+                    <a:pt x="4854239" y="2650638"/>
+                  </a:lnTo>
+                  <a:lnTo>
+                    <a:pt x="4925862" y="2650506"/>
+                  </a:lnTo>
+                  <a:lnTo>
+                    <a:pt x="4997484" y="2650374"/>
+                  </a:lnTo>
+                  <a:lnTo>
+                    <a:pt x="5069107" y="2650241"/>
+                  </a:lnTo>
+                  <a:lnTo>
+                    <a:pt x="5140729" y="2650109"/>
+                  </a:lnTo>
+                  <a:lnTo>
+                    <a:pt x="5212352" y="2649977"/>
+                  </a:lnTo>
+                  <a:lnTo>
+                    <a:pt x="5283974" y="2649844"/>
+                  </a:lnTo>
+                  <a:lnTo>
+                    <a:pt x="5355597" y="2649712"/>
                   </a:lnTo>
                 </a:path>
               </a:pathLst>
@@ -3728,312 +3728,312 @@
           </p:nvSpPr>
           <p:spPr>
             <a:xfrm>
-              <a:off x="1172049" y="4727824"/>
-              <a:ext cx="7090630" cy="589754"/>
+              <a:off x="1172049" y="4727837"/>
+              <a:ext cx="7090630" cy="588544"/>
             </a:xfrm>
             <a:custGeom>
               <a:avLst/>
               <a:pathLst>
-                <a:path w="7090630" h="589754">
+                <a:path w="7090630" h="588544">
                   <a:moveTo>
-                    <a:pt x="7090630" y="589754"/>
+                    <a:pt x="7090630" y="588544"/>
                   </a:moveTo>
                   <a:lnTo>
-                    <a:pt x="7019007" y="581000"/>
-                  </a:lnTo>
-                  <a:lnTo>
-                    <a:pt x="6947385" y="571927"/>
-                  </a:lnTo>
-                  <a:lnTo>
-                    <a:pt x="6875762" y="562523"/>
-                  </a:lnTo>
-                  <a:lnTo>
-                    <a:pt x="6804139" y="552775"/>
-                  </a:lnTo>
-                  <a:lnTo>
-                    <a:pt x="6732517" y="542671"/>
-                  </a:lnTo>
-                  <a:lnTo>
-                    <a:pt x="6660894" y="532199"/>
-                  </a:lnTo>
-                  <a:lnTo>
-                    <a:pt x="6589272" y="521343"/>
-                  </a:lnTo>
-                  <a:lnTo>
-                    <a:pt x="6517649" y="510091"/>
-                  </a:lnTo>
-                  <a:lnTo>
-                    <a:pt x="6446027" y="498429"/>
-                  </a:lnTo>
-                  <a:lnTo>
-                    <a:pt x="6374404" y="486340"/>
-                  </a:lnTo>
-                  <a:lnTo>
-                    <a:pt x="6302782" y="473810"/>
-                  </a:lnTo>
-                  <a:lnTo>
-                    <a:pt x="6231159" y="460822"/>
-                  </a:lnTo>
-                  <a:lnTo>
-                    <a:pt x="6159537" y="447360"/>
-                  </a:lnTo>
-                  <a:lnTo>
-                    <a:pt x="6087914" y="433406"/>
-                  </a:lnTo>
-                  <a:lnTo>
-                    <a:pt x="6016292" y="418943"/>
-                  </a:lnTo>
-                  <a:lnTo>
-                    <a:pt x="5944669" y="403951"/>
-                  </a:lnTo>
-                  <a:lnTo>
-                    <a:pt x="5873047" y="388412"/>
-                  </a:lnTo>
-                  <a:lnTo>
-                    <a:pt x="5801424" y="372305"/>
-                  </a:lnTo>
-                  <a:lnTo>
-                    <a:pt x="5729802" y="355610"/>
-                  </a:lnTo>
-                  <a:lnTo>
-                    <a:pt x="5658179" y="338306"/>
-                  </a:lnTo>
-                  <a:lnTo>
-                    <a:pt x="5586557" y="320369"/>
-                  </a:lnTo>
-                  <a:lnTo>
-                    <a:pt x="5514934" y="301777"/>
-                  </a:lnTo>
-                  <a:lnTo>
-                    <a:pt x="5443311" y="282506"/>
-                  </a:lnTo>
-                  <a:lnTo>
-                    <a:pt x="5371689" y="262532"/>
-                  </a:lnTo>
-                  <a:lnTo>
-                    <a:pt x="5300066" y="241828"/>
-                  </a:lnTo>
-                  <a:lnTo>
-                    <a:pt x="5228444" y="220367"/>
-                  </a:lnTo>
-                  <a:lnTo>
-                    <a:pt x="5156821" y="198123"/>
-                  </a:lnTo>
-                  <a:lnTo>
-                    <a:pt x="5085199" y="175067"/>
-                  </a:lnTo>
-                  <a:lnTo>
-                    <a:pt x="5013576" y="151168"/>
-                  </a:lnTo>
-                  <a:lnTo>
-                    <a:pt x="4941954" y="126397"/>
-                  </a:lnTo>
-                  <a:lnTo>
-                    <a:pt x="4870331" y="100721"/>
-                  </a:lnTo>
-                  <a:lnTo>
-                    <a:pt x="4798709" y="74107"/>
-                  </a:lnTo>
-                  <a:lnTo>
-                    <a:pt x="4727086" y="46522"/>
-                  </a:lnTo>
-                  <a:lnTo>
-                    <a:pt x="4655464" y="17928"/>
+                    <a:pt x="7019007" y="579783"/>
+                  </a:lnTo>
+                  <a:lnTo>
+                    <a:pt x="6947385" y="570704"/>
+                  </a:lnTo>
+                  <a:lnTo>
+                    <a:pt x="6875762" y="561294"/>
+                  </a:lnTo>
+                  <a:lnTo>
+                    <a:pt x="6804139" y="551541"/>
+                  </a:lnTo>
+                  <a:lnTo>
+                    <a:pt x="6732517" y="541434"/>
+                  </a:lnTo>
+                  <a:lnTo>
+                    <a:pt x="6660894" y="530960"/>
+                  </a:lnTo>
+                  <a:lnTo>
+                    <a:pt x="6589272" y="520104"/>
+                  </a:lnTo>
+                  <a:lnTo>
+                    <a:pt x="6517649" y="508854"/>
+                  </a:lnTo>
+                  <a:lnTo>
+                    <a:pt x="6446027" y="497194"/>
+                  </a:lnTo>
+                  <a:lnTo>
+                    <a:pt x="6374404" y="485110"/>
+                  </a:lnTo>
+                  <a:lnTo>
+                    <a:pt x="6302782" y="472587"/>
+                  </a:lnTo>
+                  <a:lnTo>
+                    <a:pt x="6231159" y="459608"/>
+                  </a:lnTo>
+                  <a:lnTo>
+                    <a:pt x="6159537" y="446157"/>
+                  </a:lnTo>
+                  <a:lnTo>
+                    <a:pt x="6087914" y="432217"/>
+                  </a:lnTo>
+                  <a:lnTo>
+                    <a:pt x="6016292" y="417770"/>
+                  </a:lnTo>
+                  <a:lnTo>
+                    <a:pt x="5944669" y="402797"/>
+                  </a:lnTo>
+                  <a:lnTo>
+                    <a:pt x="5873047" y="387280"/>
+                  </a:lnTo>
+                  <a:lnTo>
+                    <a:pt x="5801424" y="371199"/>
+                  </a:lnTo>
+                  <a:lnTo>
+                    <a:pt x="5729802" y="354532"/>
+                  </a:lnTo>
+                  <a:lnTo>
+                    <a:pt x="5658179" y="337259"/>
+                  </a:lnTo>
+                  <a:lnTo>
+                    <a:pt x="5586557" y="319358"/>
+                  </a:lnTo>
+                  <a:lnTo>
+                    <a:pt x="5514934" y="300806"/>
+                  </a:lnTo>
+                  <a:lnTo>
+                    <a:pt x="5443311" y="281579"/>
+                  </a:lnTo>
+                  <a:lnTo>
+                    <a:pt x="5371689" y="261653"/>
+                  </a:lnTo>
+                  <a:lnTo>
+                    <a:pt x="5300066" y="241002"/>
+                  </a:lnTo>
+                  <a:lnTo>
+                    <a:pt x="5228444" y="219599"/>
+                  </a:lnTo>
+                  <a:lnTo>
+                    <a:pt x="5156821" y="197419"/>
+                  </a:lnTo>
+                  <a:lnTo>
+                    <a:pt x="5085199" y="174431"/>
+                  </a:lnTo>
+                  <a:lnTo>
+                    <a:pt x="5013576" y="150607"/>
+                  </a:lnTo>
+                  <a:lnTo>
+                    <a:pt x="4941954" y="125917"/>
+                  </a:lnTo>
+                  <a:lnTo>
+                    <a:pt x="4870331" y="100329"/>
+                  </a:lnTo>
+                  <a:lnTo>
+                    <a:pt x="4798709" y="73810"/>
+                  </a:lnTo>
+                  <a:lnTo>
+                    <a:pt x="4727086" y="46327"/>
+                  </a:lnTo>
+                  <a:lnTo>
+                    <a:pt x="4655464" y="17844"/>
                   </a:lnTo>
                   <a:lnTo>
                     <a:pt x="4583841" y="0"/>
                   </a:lnTo>
                   <a:lnTo>
-                    <a:pt x="4512219" y="97"/>
-                  </a:lnTo>
-                  <a:lnTo>
-                    <a:pt x="4440596" y="194"/>
-                  </a:lnTo>
-                  <a:lnTo>
-                    <a:pt x="4368974" y="291"/>
-                  </a:lnTo>
-                  <a:lnTo>
-                    <a:pt x="4297351" y="388"/>
-                  </a:lnTo>
-                  <a:lnTo>
-                    <a:pt x="4225729" y="485"/>
-                  </a:lnTo>
-                  <a:lnTo>
-                    <a:pt x="4154106" y="582"/>
-                  </a:lnTo>
-                  <a:lnTo>
-                    <a:pt x="4082483" y="679"/>
-                  </a:lnTo>
-                  <a:lnTo>
-                    <a:pt x="4010861" y="776"/>
-                  </a:lnTo>
-                  <a:lnTo>
-                    <a:pt x="3939238" y="873"/>
-                  </a:lnTo>
-                  <a:lnTo>
-                    <a:pt x="3867616" y="970"/>
-                  </a:lnTo>
-                  <a:lnTo>
-                    <a:pt x="3795993" y="1067"/>
-                  </a:lnTo>
-                  <a:lnTo>
-                    <a:pt x="3724371" y="1164"/>
-                  </a:lnTo>
-                  <a:lnTo>
-                    <a:pt x="3652748" y="1261"/>
-                  </a:lnTo>
-                  <a:lnTo>
-                    <a:pt x="3581126" y="1358"/>
-                  </a:lnTo>
-                  <a:lnTo>
-                    <a:pt x="3509503" y="1455"/>
-                  </a:lnTo>
-                  <a:lnTo>
-                    <a:pt x="3437881" y="1552"/>
-                  </a:lnTo>
-                  <a:lnTo>
-                    <a:pt x="3366258" y="1649"/>
-                  </a:lnTo>
-                  <a:lnTo>
-                    <a:pt x="3294636" y="1745"/>
-                  </a:lnTo>
-                  <a:lnTo>
-                    <a:pt x="3223013" y="1842"/>
-                  </a:lnTo>
-                  <a:lnTo>
-                    <a:pt x="3151391" y="1939"/>
-                  </a:lnTo>
-                  <a:lnTo>
-                    <a:pt x="3079768" y="2036"/>
-                  </a:lnTo>
-                  <a:lnTo>
-                    <a:pt x="3008146" y="2133"/>
-                  </a:lnTo>
-                  <a:lnTo>
-                    <a:pt x="2936523" y="2230"/>
-                  </a:lnTo>
-                  <a:lnTo>
-                    <a:pt x="2864901" y="2327"/>
-                  </a:lnTo>
-                  <a:lnTo>
-                    <a:pt x="2793278" y="2423"/>
-                  </a:lnTo>
-                  <a:lnTo>
-                    <a:pt x="2721655" y="2520"/>
-                  </a:lnTo>
-                  <a:lnTo>
-                    <a:pt x="2650033" y="2617"/>
-                  </a:lnTo>
-                  <a:lnTo>
-                    <a:pt x="2578410" y="2714"/>
-                  </a:lnTo>
-                  <a:lnTo>
-                    <a:pt x="2506788" y="2811"/>
-                  </a:lnTo>
-                  <a:lnTo>
-                    <a:pt x="2435165" y="2907"/>
-                  </a:lnTo>
-                  <a:lnTo>
-                    <a:pt x="2363543" y="3004"/>
-                  </a:lnTo>
-                  <a:lnTo>
-                    <a:pt x="2291920" y="3101"/>
-                  </a:lnTo>
-                  <a:lnTo>
-                    <a:pt x="2220298" y="3198"/>
-                  </a:lnTo>
-                  <a:lnTo>
-                    <a:pt x="2148675" y="3294"/>
-                  </a:lnTo>
-                  <a:lnTo>
-                    <a:pt x="2077053" y="3391"/>
-                  </a:lnTo>
-                  <a:lnTo>
-                    <a:pt x="2005430" y="3488"/>
-                  </a:lnTo>
-                  <a:lnTo>
-                    <a:pt x="1933808" y="3584"/>
-                  </a:lnTo>
-                  <a:lnTo>
-                    <a:pt x="1862185" y="3681"/>
-                  </a:lnTo>
-                  <a:lnTo>
-                    <a:pt x="1790563" y="3778"/>
-                  </a:lnTo>
-                  <a:lnTo>
-                    <a:pt x="1718940" y="3874"/>
-                  </a:lnTo>
-                  <a:lnTo>
-                    <a:pt x="1647318" y="3971"/>
-                  </a:lnTo>
-                  <a:lnTo>
-                    <a:pt x="1575695" y="4068"/>
-                  </a:lnTo>
-                  <a:lnTo>
-                    <a:pt x="1504073" y="4164"/>
-                  </a:lnTo>
-                  <a:lnTo>
-                    <a:pt x="1432450" y="4261"/>
-                  </a:lnTo>
-                  <a:lnTo>
-                    <a:pt x="1360827" y="4358"/>
-                  </a:lnTo>
-                  <a:lnTo>
-                    <a:pt x="1289205" y="4454"/>
-                  </a:lnTo>
-                  <a:lnTo>
-                    <a:pt x="1217582" y="4551"/>
-                  </a:lnTo>
-                  <a:lnTo>
-                    <a:pt x="1145960" y="4647"/>
-                  </a:lnTo>
-                  <a:lnTo>
-                    <a:pt x="1074337" y="4744"/>
-                  </a:lnTo>
-                  <a:lnTo>
-                    <a:pt x="1002715" y="4840"/>
-                  </a:lnTo>
-                  <a:lnTo>
-                    <a:pt x="931092" y="4937"/>
-                  </a:lnTo>
-                  <a:lnTo>
-                    <a:pt x="859470" y="5033"/>
-                  </a:lnTo>
-                  <a:lnTo>
-                    <a:pt x="787847" y="5130"/>
-                  </a:lnTo>
-                  <a:lnTo>
-                    <a:pt x="716225" y="5226"/>
-                  </a:lnTo>
-                  <a:lnTo>
-                    <a:pt x="644602" y="5323"/>
-                  </a:lnTo>
-                  <a:lnTo>
-                    <a:pt x="572980" y="5419"/>
-                  </a:lnTo>
-                  <a:lnTo>
-                    <a:pt x="501357" y="5516"/>
-                  </a:lnTo>
-                  <a:lnTo>
-                    <a:pt x="429735" y="5612"/>
-                  </a:lnTo>
-                  <a:lnTo>
-                    <a:pt x="358112" y="5709"/>
-                  </a:lnTo>
-                  <a:lnTo>
-                    <a:pt x="286490" y="5805"/>
-                  </a:lnTo>
-                  <a:lnTo>
-                    <a:pt x="214867" y="5902"/>
-                  </a:lnTo>
-                  <a:lnTo>
-                    <a:pt x="143245" y="5998"/>
-                  </a:lnTo>
-                  <a:lnTo>
-                    <a:pt x="71622" y="6094"/>
-                  </a:lnTo>
-                  <a:lnTo>
-                    <a:pt x="0" y="6191"/>
+                    <a:pt x="4512219" y="131"/>
+                  </a:lnTo>
+                  <a:lnTo>
+                    <a:pt x="4440596" y="263"/>
+                  </a:lnTo>
+                  <a:lnTo>
+                    <a:pt x="4368974" y="395"/>
+                  </a:lnTo>
+                  <a:lnTo>
+                    <a:pt x="4297351" y="526"/>
+                  </a:lnTo>
+                  <a:lnTo>
+                    <a:pt x="4225729" y="658"/>
+                  </a:lnTo>
+                  <a:lnTo>
+                    <a:pt x="4154106" y="789"/>
+                  </a:lnTo>
+                  <a:lnTo>
+                    <a:pt x="4082483" y="921"/>
+                  </a:lnTo>
+                  <a:lnTo>
+                    <a:pt x="4010861" y="1052"/>
+                  </a:lnTo>
+                  <a:lnTo>
+                    <a:pt x="3939238" y="1184"/>
+                  </a:lnTo>
+                  <a:lnTo>
+                    <a:pt x="3867616" y="1315"/>
+                  </a:lnTo>
+                  <a:lnTo>
+                    <a:pt x="3795993" y="1447"/>
+                  </a:lnTo>
+                  <a:lnTo>
+                    <a:pt x="3724371" y="1578"/>
+                  </a:lnTo>
+                  <a:lnTo>
+                    <a:pt x="3652748" y="1710"/>
+                  </a:lnTo>
+                  <a:lnTo>
+                    <a:pt x="3581126" y="1841"/>
+                  </a:lnTo>
+                  <a:lnTo>
+                    <a:pt x="3509503" y="1973"/>
+                  </a:lnTo>
+                  <a:lnTo>
+                    <a:pt x="3437881" y="2104"/>
+                  </a:lnTo>
+                  <a:lnTo>
+                    <a:pt x="3366258" y="2235"/>
+                  </a:lnTo>
+                  <a:lnTo>
+                    <a:pt x="3294636" y="2367"/>
+                  </a:lnTo>
+                  <a:lnTo>
+                    <a:pt x="3223013" y="2498"/>
+                  </a:lnTo>
+                  <a:lnTo>
+                    <a:pt x="3151391" y="2629"/>
+                  </a:lnTo>
+                  <a:lnTo>
+                    <a:pt x="3079768" y="2761"/>
+                  </a:lnTo>
+                  <a:lnTo>
+                    <a:pt x="3008146" y="2892"/>
+                  </a:lnTo>
+                  <a:lnTo>
+                    <a:pt x="2936523" y="3023"/>
+                  </a:lnTo>
+                  <a:lnTo>
+                    <a:pt x="2864901" y="3154"/>
+                  </a:lnTo>
+                  <a:lnTo>
+                    <a:pt x="2793278" y="3285"/>
+                  </a:lnTo>
+                  <a:lnTo>
+                    <a:pt x="2721655" y="3417"/>
+                  </a:lnTo>
+                  <a:lnTo>
+                    <a:pt x="2650033" y="3548"/>
+                  </a:lnTo>
+                  <a:lnTo>
+                    <a:pt x="2578410" y="3679"/>
+                  </a:lnTo>
+                  <a:lnTo>
+                    <a:pt x="2506788" y="3810"/>
+                  </a:lnTo>
+                  <a:lnTo>
+                    <a:pt x="2435165" y="3941"/>
+                  </a:lnTo>
+                  <a:lnTo>
+                    <a:pt x="2363543" y="4072"/>
+                  </a:lnTo>
+                  <a:lnTo>
+                    <a:pt x="2291920" y="4203"/>
+                  </a:lnTo>
+                  <a:lnTo>
+                    <a:pt x="2220298" y="4334"/>
+                  </a:lnTo>
+                  <a:lnTo>
+                    <a:pt x="2148675" y="4465"/>
+                  </a:lnTo>
+                  <a:lnTo>
+                    <a:pt x="2077053" y="4596"/>
+                  </a:lnTo>
+                  <a:lnTo>
+                    <a:pt x="2005430" y="4727"/>
+                  </a:lnTo>
+                  <a:lnTo>
+                    <a:pt x="1933808" y="4858"/>
+                  </a:lnTo>
+                  <a:lnTo>
+                    <a:pt x="1862185" y="4989"/>
+                  </a:lnTo>
+                  <a:lnTo>
+                    <a:pt x="1790563" y="5120"/>
+                  </a:lnTo>
+                  <a:lnTo>
+                    <a:pt x="1718940" y="5251"/>
+                  </a:lnTo>
+                  <a:lnTo>
+                    <a:pt x="1647318" y="5382"/>
+                  </a:lnTo>
+                  <a:lnTo>
+                    <a:pt x="1575695" y="5512"/>
+                  </a:lnTo>
+                  <a:lnTo>
+                    <a:pt x="1504073" y="5643"/>
+                  </a:lnTo>
+                  <a:lnTo>
+                    <a:pt x="1432450" y="5774"/>
+                  </a:lnTo>
+                  <a:lnTo>
+                    <a:pt x="1360827" y="5905"/>
+                  </a:lnTo>
+                  <a:lnTo>
+                    <a:pt x="1289205" y="6036"/>
+                  </a:lnTo>
+                  <a:lnTo>
+                    <a:pt x="1217582" y="6166"/>
+                  </a:lnTo>
+                  <a:lnTo>
+                    <a:pt x="1145960" y="6297"/>
+                  </a:lnTo>
+                  <a:lnTo>
+                    <a:pt x="1074337" y="6428"/>
+                  </a:lnTo>
+                  <a:lnTo>
+                    <a:pt x="1002715" y="6558"/>
+                  </a:lnTo>
+                  <a:lnTo>
+                    <a:pt x="931092" y="6689"/>
+                  </a:lnTo>
+                  <a:lnTo>
+                    <a:pt x="859470" y="6820"/>
+                  </a:lnTo>
+                  <a:lnTo>
+                    <a:pt x="787847" y="6950"/>
+                  </a:lnTo>
+                  <a:lnTo>
+                    <a:pt x="716225" y="7081"/>
+                  </a:lnTo>
+                  <a:lnTo>
+                    <a:pt x="644602" y="7211"/>
+                  </a:lnTo>
+                  <a:lnTo>
+                    <a:pt x="572980" y="7342"/>
+                  </a:lnTo>
+                  <a:lnTo>
+                    <a:pt x="501357" y="7472"/>
+                  </a:lnTo>
+                  <a:lnTo>
+                    <a:pt x="429735" y="7603"/>
+                  </a:lnTo>
+                  <a:lnTo>
+                    <a:pt x="358112" y="7733"/>
+                  </a:lnTo>
+                  <a:lnTo>
+                    <a:pt x="286490" y="7864"/>
+                  </a:lnTo>
+                  <a:lnTo>
+                    <a:pt x="214867" y="7994"/>
+                  </a:lnTo>
+                  <a:lnTo>
+                    <a:pt x="143245" y="8125"/>
+                  </a:lnTo>
+                  <a:lnTo>
+                    <a:pt x="71622" y="8255"/>
+                  </a:lnTo>
+                  <a:lnTo>
+                    <a:pt x="0" y="8386"/>
                   </a:lnTo>
                 </a:path>
               </a:pathLst>
@@ -4053,312 +4053,312 @@
           </p:nvSpPr>
           <p:spPr>
             <a:xfrm>
-              <a:off x="1172049" y="2934796"/>
-              <a:ext cx="7090630" cy="2175680"/>
+              <a:off x="1172049" y="2950412"/>
+              <a:ext cx="7090630" cy="2158628"/>
             </a:xfrm>
             <a:custGeom>
               <a:avLst/>
               <a:pathLst>
-                <a:path w="7090630" h="2175680">
+                <a:path w="7090630" h="2158628">
                   <a:moveTo>
                     <a:pt x="0" y="0"/>
                   </a:moveTo>
                   <a:lnTo>
-                    <a:pt x="71622" y="46464"/>
-                  </a:lnTo>
-                  <a:lnTo>
-                    <a:pt x="143245" y="92106"/>
-                  </a:lnTo>
-                  <a:lnTo>
-                    <a:pt x="214867" y="136939"/>
-                  </a:lnTo>
-                  <a:lnTo>
-                    <a:pt x="286490" y="180977"/>
-                  </a:lnTo>
-                  <a:lnTo>
-                    <a:pt x="358112" y="224236"/>
-                  </a:lnTo>
-                  <a:lnTo>
-                    <a:pt x="429735" y="266727"/>
-                  </a:lnTo>
-                  <a:lnTo>
-                    <a:pt x="501357" y="308466"/>
-                  </a:lnTo>
-                  <a:lnTo>
-                    <a:pt x="572980" y="349466"/>
-                  </a:lnTo>
-                  <a:lnTo>
-                    <a:pt x="644602" y="389739"/>
-                  </a:lnTo>
-                  <a:lnTo>
-                    <a:pt x="716225" y="429298"/>
-                  </a:lnTo>
-                  <a:lnTo>
-                    <a:pt x="787847" y="468156"/>
-                  </a:lnTo>
-                  <a:lnTo>
-                    <a:pt x="859470" y="506326"/>
-                  </a:lnTo>
-                  <a:lnTo>
-                    <a:pt x="931092" y="543820"/>
-                  </a:lnTo>
-                  <a:lnTo>
-                    <a:pt x="1002715" y="580650"/>
-                  </a:lnTo>
-                  <a:lnTo>
-                    <a:pt x="1074337" y="616826"/>
-                  </a:lnTo>
-                  <a:lnTo>
-                    <a:pt x="1145960" y="652362"/>
-                  </a:lnTo>
-                  <a:lnTo>
-                    <a:pt x="1217582" y="687268"/>
-                  </a:lnTo>
-                  <a:lnTo>
-                    <a:pt x="1289205" y="721556"/>
-                  </a:lnTo>
-                  <a:lnTo>
-                    <a:pt x="1360827" y="755236"/>
-                  </a:lnTo>
-                  <a:lnTo>
-                    <a:pt x="1432450" y="788320"/>
-                  </a:lnTo>
-                  <a:lnTo>
-                    <a:pt x="1504073" y="820817"/>
-                  </a:lnTo>
-                  <a:lnTo>
-                    <a:pt x="1575695" y="852739"/>
-                  </a:lnTo>
-                  <a:lnTo>
-                    <a:pt x="1647318" y="884095"/>
-                  </a:lnTo>
-                  <a:lnTo>
-                    <a:pt x="1718940" y="914895"/>
-                  </a:lnTo>
-                  <a:lnTo>
-                    <a:pt x="1790563" y="945150"/>
-                  </a:lnTo>
-                  <a:lnTo>
-                    <a:pt x="1862185" y="974868"/>
-                  </a:lnTo>
-                  <a:lnTo>
-                    <a:pt x="1933808" y="1004060"/>
-                  </a:lnTo>
-                  <a:lnTo>
-                    <a:pt x="2005430" y="1032735"/>
-                  </a:lnTo>
-                  <a:lnTo>
-                    <a:pt x="2077053" y="1060902"/>
-                  </a:lnTo>
-                  <a:lnTo>
-                    <a:pt x="2148675" y="1088569"/>
-                  </a:lnTo>
-                  <a:lnTo>
-                    <a:pt x="2220298" y="1115747"/>
-                  </a:lnTo>
-                  <a:lnTo>
-                    <a:pt x="2291920" y="1142443"/>
-                  </a:lnTo>
-                  <a:lnTo>
-                    <a:pt x="2363543" y="1168666"/>
-                  </a:lnTo>
-                  <a:lnTo>
-                    <a:pt x="2435165" y="1194424"/>
-                  </a:lnTo>
-                  <a:lnTo>
-                    <a:pt x="2506788" y="1219726"/>
-                  </a:lnTo>
-                  <a:lnTo>
-                    <a:pt x="2578410" y="1244580"/>
-                  </a:lnTo>
-                  <a:lnTo>
-                    <a:pt x="2650033" y="1268993"/>
-                  </a:lnTo>
-                  <a:lnTo>
-                    <a:pt x="2721655" y="1292974"/>
-                  </a:lnTo>
-                  <a:lnTo>
-                    <a:pt x="2793278" y="1316529"/>
-                  </a:lnTo>
-                  <a:lnTo>
-                    <a:pt x="2864901" y="1339668"/>
-                  </a:lnTo>
-                  <a:lnTo>
-                    <a:pt x="2936523" y="1362396"/>
-                  </a:lnTo>
-                  <a:lnTo>
-                    <a:pt x="3008146" y="1384722"/>
-                  </a:lnTo>
-                  <a:lnTo>
-                    <a:pt x="3079768" y="1406652"/>
-                  </a:lnTo>
-                  <a:lnTo>
-                    <a:pt x="3151391" y="1428194"/>
-                  </a:lnTo>
-                  <a:lnTo>
-                    <a:pt x="3223013" y="1449354"/>
-                  </a:lnTo>
-                  <a:lnTo>
-                    <a:pt x="3294636" y="1470139"/>
-                  </a:lnTo>
-                  <a:lnTo>
-                    <a:pt x="3366258" y="1490556"/>
-                  </a:lnTo>
-                  <a:lnTo>
-                    <a:pt x="3437881" y="1510611"/>
-                  </a:lnTo>
-                  <a:lnTo>
-                    <a:pt x="3509503" y="1530310"/>
-                  </a:lnTo>
-                  <a:lnTo>
-                    <a:pt x="3581126" y="1549661"/>
-                  </a:lnTo>
-                  <a:lnTo>
-                    <a:pt x="3652748" y="1568669"/>
-                  </a:lnTo>
-                  <a:lnTo>
-                    <a:pt x="3724371" y="1587340"/>
-                  </a:lnTo>
-                  <a:lnTo>
-                    <a:pt x="3795993" y="1605680"/>
-                  </a:lnTo>
-                  <a:lnTo>
-                    <a:pt x="3867616" y="1623695"/>
-                  </a:lnTo>
-                  <a:lnTo>
-                    <a:pt x="3939238" y="1641391"/>
-                  </a:lnTo>
-                  <a:lnTo>
-                    <a:pt x="4010861" y="1658774"/>
-                  </a:lnTo>
-                  <a:lnTo>
-                    <a:pt x="4082483" y="1675849"/>
-                  </a:lnTo>
-                  <a:lnTo>
-                    <a:pt x="4154106" y="1692621"/>
-                  </a:lnTo>
-                  <a:lnTo>
-                    <a:pt x="4225729" y="1709095"/>
-                  </a:lnTo>
-                  <a:lnTo>
-                    <a:pt x="4297351" y="1725278"/>
-                  </a:lnTo>
-                  <a:lnTo>
-                    <a:pt x="4368974" y="1741175"/>
-                  </a:lnTo>
-                  <a:lnTo>
-                    <a:pt x="4440596" y="1756789"/>
-                  </a:lnTo>
-                  <a:lnTo>
-                    <a:pt x="4512219" y="1772127"/>
-                  </a:lnTo>
-                  <a:lnTo>
-                    <a:pt x="4583841" y="1787193"/>
-                  </a:lnTo>
-                  <a:lnTo>
-                    <a:pt x="4655464" y="1801992"/>
-                  </a:lnTo>
-                  <a:lnTo>
-                    <a:pt x="4727086" y="1816529"/>
-                  </a:lnTo>
-                  <a:lnTo>
-                    <a:pt x="4798709" y="1830809"/>
-                  </a:lnTo>
-                  <a:lnTo>
-                    <a:pt x="4870331" y="1844835"/>
-                  </a:lnTo>
-                  <a:lnTo>
-                    <a:pt x="4941954" y="1858613"/>
-                  </a:lnTo>
-                  <a:lnTo>
-                    <a:pt x="5013576" y="1872147"/>
-                  </a:lnTo>
-                  <a:lnTo>
-                    <a:pt x="5085199" y="1885441"/>
-                  </a:lnTo>
-                  <a:lnTo>
-                    <a:pt x="5156821" y="1898499"/>
-                  </a:lnTo>
-                  <a:lnTo>
-                    <a:pt x="5228444" y="1911326"/>
-                  </a:lnTo>
-                  <a:lnTo>
-                    <a:pt x="5300066" y="1923926"/>
-                  </a:lnTo>
-                  <a:lnTo>
-                    <a:pt x="5371689" y="1936303"/>
-                  </a:lnTo>
-                  <a:lnTo>
-                    <a:pt x="5443311" y="1948460"/>
-                  </a:lnTo>
-                  <a:lnTo>
-                    <a:pt x="5514934" y="1960402"/>
-                  </a:lnTo>
-                  <a:lnTo>
-                    <a:pt x="5586557" y="1972132"/>
-                  </a:lnTo>
-                  <a:lnTo>
-                    <a:pt x="5658179" y="1983654"/>
-                  </a:lnTo>
-                  <a:lnTo>
-                    <a:pt x="5729802" y="1994973"/>
-                  </a:lnTo>
-                  <a:lnTo>
-                    <a:pt x="5801424" y="2006090"/>
-                  </a:lnTo>
-                  <a:lnTo>
-                    <a:pt x="5873047" y="2017011"/>
-                  </a:lnTo>
-                  <a:lnTo>
-                    <a:pt x="5944669" y="2027738"/>
-                  </a:lnTo>
-                  <a:lnTo>
-                    <a:pt x="6016292" y="2038276"/>
-                  </a:lnTo>
-                  <a:lnTo>
-                    <a:pt x="6087914" y="2048626"/>
-                  </a:lnTo>
-                  <a:lnTo>
-                    <a:pt x="6159537" y="2058793"/>
-                  </a:lnTo>
-                  <a:lnTo>
-                    <a:pt x="6231159" y="2068780"/>
-                  </a:lnTo>
-                  <a:lnTo>
-                    <a:pt x="6302782" y="2078590"/>
-                  </a:lnTo>
-                  <a:lnTo>
-                    <a:pt x="6374404" y="2088226"/>
-                  </a:lnTo>
-                  <a:lnTo>
-                    <a:pt x="6446027" y="2097692"/>
-                  </a:lnTo>
-                  <a:lnTo>
-                    <a:pt x="6517649" y="2106990"/>
-                  </a:lnTo>
-                  <a:lnTo>
-                    <a:pt x="6589272" y="2116123"/>
-                  </a:lnTo>
-                  <a:lnTo>
-                    <a:pt x="6660894" y="2125094"/>
-                  </a:lnTo>
-                  <a:lnTo>
-                    <a:pt x="6732517" y="2133906"/>
-                  </a:lnTo>
-                  <a:lnTo>
-                    <a:pt x="6804139" y="2142562"/>
-                  </a:lnTo>
-                  <a:lnTo>
-                    <a:pt x="6875762" y="2151065"/>
-                  </a:lnTo>
-                  <a:lnTo>
-                    <a:pt x="6947385" y="2159417"/>
-                  </a:lnTo>
-                  <a:lnTo>
-                    <a:pt x="7019007" y="2167621"/>
-                  </a:lnTo>
-                  <a:lnTo>
-                    <a:pt x="7090630" y="2175680"/>
+                    <a:pt x="71622" y="45950"/>
+                  </a:lnTo>
+                  <a:lnTo>
+                    <a:pt x="143245" y="91091"/>
+                  </a:lnTo>
+                  <a:lnTo>
+                    <a:pt x="214867" y="135436"/>
+                  </a:lnTo>
+                  <a:lnTo>
+                    <a:pt x="286490" y="178999"/>
+                  </a:lnTo>
+                  <a:lnTo>
+                    <a:pt x="358112" y="221794"/>
+                  </a:lnTo>
+                  <a:lnTo>
+                    <a:pt x="429735" y="263836"/>
+                  </a:lnTo>
+                  <a:lnTo>
+                    <a:pt x="501357" y="305136"/>
+                  </a:lnTo>
+                  <a:lnTo>
+                    <a:pt x="572980" y="345708"/>
+                  </a:lnTo>
+                  <a:lnTo>
+                    <a:pt x="644602" y="385564"/>
+                  </a:lnTo>
+                  <a:lnTo>
+                    <a:pt x="716225" y="424719"/>
+                  </a:lnTo>
+                  <a:lnTo>
+                    <a:pt x="787847" y="463183"/>
+                  </a:lnTo>
+                  <a:lnTo>
+                    <a:pt x="859470" y="500969"/>
+                  </a:lnTo>
+                  <a:lnTo>
+                    <a:pt x="931092" y="538089"/>
+                  </a:lnTo>
+                  <a:lnTo>
+                    <a:pt x="1002715" y="574555"/>
+                  </a:lnTo>
+                  <a:lnTo>
+                    <a:pt x="1074337" y="610378"/>
+                  </a:lnTo>
+                  <a:lnTo>
+                    <a:pt x="1145960" y="645569"/>
+                  </a:lnTo>
+                  <a:lnTo>
+                    <a:pt x="1217582" y="680140"/>
+                  </a:lnTo>
+                  <a:lnTo>
+                    <a:pt x="1289205" y="714102"/>
+                  </a:lnTo>
+                  <a:lnTo>
+                    <a:pt x="1360827" y="747465"/>
+                  </a:lnTo>
+                  <a:lnTo>
+                    <a:pt x="1432450" y="780240"/>
+                  </a:lnTo>
+                  <a:lnTo>
+                    <a:pt x="1504073" y="812438"/>
+                  </a:lnTo>
+                  <a:lnTo>
+                    <a:pt x="1575695" y="844068"/>
+                  </a:lnTo>
+                  <a:lnTo>
+                    <a:pt x="1647318" y="875140"/>
+                  </a:lnTo>
+                  <a:lnTo>
+                    <a:pt x="1718940" y="905664"/>
+                  </a:lnTo>
+                  <a:lnTo>
+                    <a:pt x="1790563" y="935651"/>
+                  </a:lnTo>
+                  <a:lnTo>
+                    <a:pt x="1862185" y="965109"/>
+                  </a:lnTo>
+                  <a:lnTo>
+                    <a:pt x="1933808" y="994048"/>
+                  </a:lnTo>
+                  <a:lnTo>
+                    <a:pt x="2005430" y="1022476"/>
+                  </a:lnTo>
+                  <a:lnTo>
+                    <a:pt x="2077053" y="1050404"/>
+                  </a:lnTo>
+                  <a:lnTo>
+                    <a:pt x="2148675" y="1077839"/>
+                  </a:lnTo>
+                  <a:lnTo>
+                    <a:pt x="2220298" y="1104790"/>
+                  </a:lnTo>
+                  <a:lnTo>
+                    <a:pt x="2291920" y="1131267"/>
+                  </a:lnTo>
+                  <a:lnTo>
+                    <a:pt x="2363543" y="1157277"/>
+                  </a:lnTo>
+                  <a:lnTo>
+                    <a:pt x="2435165" y="1182828"/>
+                  </a:lnTo>
+                  <a:lnTo>
+                    <a:pt x="2506788" y="1207929"/>
+                  </a:lnTo>
+                  <a:lnTo>
+                    <a:pt x="2578410" y="1232588"/>
+                  </a:lnTo>
+                  <a:lnTo>
+                    <a:pt x="2650033" y="1256811"/>
+                  </a:lnTo>
+                  <a:lnTo>
+                    <a:pt x="2721655" y="1280608"/>
+                  </a:lnTo>
+                  <a:lnTo>
+                    <a:pt x="2793278" y="1303986"/>
+                  </a:lnTo>
+                  <a:lnTo>
+                    <a:pt x="2864901" y="1326951"/>
+                  </a:lnTo>
+                  <a:lnTo>
+                    <a:pt x="2936523" y="1349511"/>
+                  </a:lnTo>
+                  <a:lnTo>
+                    <a:pt x="3008146" y="1371674"/>
+                  </a:lnTo>
+                  <a:lnTo>
+                    <a:pt x="3079768" y="1393446"/>
+                  </a:lnTo>
+                  <a:lnTo>
+                    <a:pt x="3151391" y="1414835"/>
+                  </a:lnTo>
+                  <a:lnTo>
+                    <a:pt x="3223013" y="1435846"/>
+                  </a:lnTo>
+                  <a:lnTo>
+                    <a:pt x="3294636" y="1456487"/>
+                  </a:lnTo>
+                  <a:lnTo>
+                    <a:pt x="3366258" y="1476764"/>
+                  </a:lnTo>
+                  <a:lnTo>
+                    <a:pt x="3437881" y="1496684"/>
+                  </a:lnTo>
+                  <a:lnTo>
+                    <a:pt x="3509503" y="1516253"/>
+                  </a:lnTo>
+                  <a:lnTo>
+                    <a:pt x="3581126" y="1535476"/>
+                  </a:lnTo>
+                  <a:lnTo>
+                    <a:pt x="3652748" y="1554361"/>
+                  </a:lnTo>
+                  <a:lnTo>
+                    <a:pt x="3724371" y="1572913"/>
+                  </a:lnTo>
+                  <a:lnTo>
+                    <a:pt x="3795993" y="1591138"/>
+                  </a:lnTo>
+                  <a:lnTo>
+                    <a:pt x="3867616" y="1609042"/>
+                  </a:lnTo>
+                  <a:lnTo>
+                    <a:pt x="3939238" y="1626630"/>
+                  </a:lnTo>
+                  <a:lnTo>
+                    <a:pt x="4010861" y="1643908"/>
+                  </a:lnTo>
+                  <a:lnTo>
+                    <a:pt x="4082483" y="1660882"/>
+                  </a:lnTo>
+                  <a:lnTo>
+                    <a:pt x="4154106" y="1677556"/>
+                  </a:lnTo>
+                  <a:lnTo>
+                    <a:pt x="4225729" y="1693936"/>
+                  </a:lnTo>
+                  <a:lnTo>
+                    <a:pt x="4297351" y="1710028"/>
+                  </a:lnTo>
+                  <a:lnTo>
+                    <a:pt x="4368974" y="1725836"/>
+                  </a:lnTo>
+                  <a:lnTo>
+                    <a:pt x="4440596" y="1741365"/>
+                  </a:lnTo>
+                  <a:lnTo>
+                    <a:pt x="4512219" y="1756621"/>
+                  </a:lnTo>
+                  <a:lnTo>
+                    <a:pt x="4583841" y="1771608"/>
+                  </a:lnTo>
+                  <a:lnTo>
+                    <a:pt x="4655464" y="1786330"/>
+                  </a:lnTo>
+                  <a:lnTo>
+                    <a:pt x="4727086" y="1800793"/>
+                  </a:lnTo>
+                  <a:lnTo>
+                    <a:pt x="4798709" y="1815001"/>
+                  </a:lnTo>
+                  <a:lnTo>
+                    <a:pt x="4870331" y="1828959"/>
+                  </a:lnTo>
+                  <a:lnTo>
+                    <a:pt x="4941954" y="1842671"/>
+                  </a:lnTo>
+                  <a:lnTo>
+                    <a:pt x="5013576" y="1856141"/>
+                  </a:lnTo>
+                  <a:lnTo>
+                    <a:pt x="5085199" y="1869373"/>
+                  </a:lnTo>
+                  <a:lnTo>
+                    <a:pt x="5156821" y="1882372"/>
+                  </a:lnTo>
+                  <a:lnTo>
+                    <a:pt x="5228444" y="1895143"/>
+                  </a:lnTo>
+                  <a:lnTo>
+                    <a:pt x="5300066" y="1907688"/>
+                  </a:lnTo>
+                  <a:lnTo>
+                    <a:pt x="5371689" y="1920011"/>
+                  </a:lnTo>
+                  <a:lnTo>
+                    <a:pt x="5443311" y="1932118"/>
+                  </a:lnTo>
+                  <a:lnTo>
+                    <a:pt x="5514934" y="1944011"/>
+                  </a:lnTo>
+                  <a:lnTo>
+                    <a:pt x="5586557" y="1955695"/>
+                  </a:lnTo>
+                  <a:lnTo>
+                    <a:pt x="5658179" y="1967173"/>
+                  </a:lnTo>
+                  <a:lnTo>
+                    <a:pt x="5729802" y="1978448"/>
+                  </a:lnTo>
+                  <a:lnTo>
+                    <a:pt x="5801424" y="1989525"/>
+                  </a:lnTo>
+                  <a:lnTo>
+                    <a:pt x="5873047" y="2000406"/>
+                  </a:lnTo>
+                  <a:lnTo>
+                    <a:pt x="5944669" y="2011095"/>
+                  </a:lnTo>
+                  <a:lnTo>
+                    <a:pt x="6016292" y="2021597"/>
+                  </a:lnTo>
+                  <a:lnTo>
+                    <a:pt x="6087914" y="2031913"/>
+                  </a:lnTo>
+                  <a:lnTo>
+                    <a:pt x="6159537" y="2042047"/>
+                  </a:lnTo>
+                  <a:lnTo>
+                    <a:pt x="6231159" y="2052002"/>
+                  </a:lnTo>
+                  <a:lnTo>
+                    <a:pt x="6302782" y="2061782"/>
+                  </a:lnTo>
+                  <a:lnTo>
+                    <a:pt x="6374404" y="2071390"/>
+                  </a:lnTo>
+                  <a:lnTo>
+                    <a:pt x="6446027" y="2080828"/>
+                  </a:lnTo>
+                  <a:lnTo>
+                    <a:pt x="6517649" y="2090100"/>
+                  </a:lnTo>
+                  <a:lnTo>
+                    <a:pt x="6589272" y="2099209"/>
+                  </a:lnTo>
+                  <a:lnTo>
+                    <a:pt x="6660894" y="2108157"/>
+                  </a:lnTo>
+                  <a:lnTo>
+                    <a:pt x="6732517" y="2116947"/>
+                  </a:lnTo>
+                  <a:lnTo>
+                    <a:pt x="6804139" y="2125582"/>
+                  </a:lnTo>
+                  <a:lnTo>
+                    <a:pt x="6875762" y="2134065"/>
+                  </a:lnTo>
+                  <a:lnTo>
+                    <a:pt x="6947385" y="2142399"/>
+                  </a:lnTo>
+                  <a:lnTo>
+                    <a:pt x="7019007" y="2150585"/>
+                  </a:lnTo>
+                  <a:lnTo>
+                    <a:pt x="7090630" y="2158628"/>
                   </a:lnTo>
                 </a:path>
               </a:pathLst>
@@ -5052,7 +5052,7 @@
                   <a:latin typeface="Helvetica"/>
                   <a:cs typeface="Helvetica"/>
                 </a:rPr>
-                <a:t>subHR per 10 mL/min decline: 1.29 (1.00-1.66), p_Bonf = 0.309 (n = 6)  |  per IQR decline (Δ = 21.9): 1.73 (1.00-3.02)  |  IQR: [-10.5, 11.4]</a:t>
+                <a:t>subHR per 10 mL/min decline: 1.28 (1.00-1.65), p_Bonf = 0.312 (n = 6)  |  per IQR decline (Δ = 21.9): 1.73 (1.00-3.00)  |  IQR: [-10.5, 11.4]</a:t>
               </a:r>
             </a:p>
           </p:txBody>
